--- a/hackathon/report and results/Frontier_Tech_Leaders_ Programme_Template - hackathon.pptx
+++ b/hackathon/report and results/Frontier_Tech_Leaders_ Programme_Template - hackathon.pptx
@@ -1122,7 +1122,7 @@
       <inkml:brushProperty name="height" value="0.1" units="cm"/>
     </inkml:brush>
   </inkml:definitions>
-  <inkml:trace contextRef="#ctx0" brushRef="#br0">-1282816-433664 8642 0 0,'0'0'0'0'0</inkml:trace>
+  <inkml:trace contextRef="#ctx0" brushRef="#br0">-2147483648-2147483648 8642 0 0,'0'0'0'0'0</inkml:trace>
 </inkml:ink>
 </file>
 
@@ -1184,7 +1184,7 @@
       <inkml:brushProperty name="height" value="0.1" units="cm"/>
     </inkml:brush>
   </inkml:definitions>
-  <inkml:trace contextRef="#ctx0" brushRef="#br0">22541 4514 8642 0 0,'0'0'0'0'0</inkml:trace>
+  <inkml:trace contextRef="#ctx0" brushRef="#br0">-84705280-13434880 8642 0 0,'0'0'0'0'0</inkml:trace>
 </inkml:ink>
 </file>
 
@@ -1246,7 +1246,7 @@
       <inkml:brushProperty name="height" value="0.1" units="cm"/>
     </inkml:brush>
   </inkml:definitions>
-  <inkml:trace contextRef="#ctx0" brushRef="#br0">22541 4514 8642 0 0,'0'0'0'0'0</inkml:trace>
+  <inkml:trace contextRef="#ctx0" brushRef="#br0">-784859136 120586240 8642 0 0,'0'0'0'0'0</inkml:trace>
 </inkml:ink>
 </file>
 
@@ -1339,7 +1339,7 @@
       <inkml:brushProperty name="height" value="0.1" units="cm"/>
     </inkml:brush>
   </inkml:definitions>
-  <inkml:trace contextRef="#ctx0" brushRef="#br0">-1282816-433664 8642 0 0,'0'0'0'0'0</inkml:trace>
+  <inkml:trace contextRef="#ctx0" brushRef="#br0">-2147483648-2147483648 8642 0 0,'0'0'0'0'0</inkml:trace>
 </inkml:ink>
 </file>
 
@@ -1401,7 +1401,7 @@
       <inkml:brushProperty name="height" value="0.1" units="cm"/>
     </inkml:brush>
   </inkml:definitions>
-  <inkml:trace contextRef="#ctx0" brushRef="#br0">23613 4482 8642 0 0,'0'0'0'0'0</inkml:trace>
+  <inkml:trace contextRef="#ctx0" brushRef="#br0">-2147483648-2147483648 8642 0 0,'0'0'0'0'0</inkml:trace>
 </inkml:ink>
 </file>
 
@@ -1463,7 +1463,7 @@
       <inkml:brushProperty name="height" value="0.1" units="cm"/>
     </inkml:brush>
   </inkml:definitions>
-  <inkml:trace contextRef="#ctx0" brushRef="#br0">23613 4482 8642 0 0,'0'0'0'0'0</inkml:trace>
+  <inkml:trace contextRef="#ctx0" brushRef="#br0">-2147483648 70254592 8642 0 0,'0'0'0'0'0</inkml:trace>
 </inkml:ink>
 </file>
 
@@ -1525,7 +1525,7 @@
       <inkml:brushProperty name="height" value="0.1" units="cm"/>
     </inkml:brush>
   </inkml:definitions>
-  <inkml:trace contextRef="#ctx0" brushRef="#br0">22457 4506 8642 0 0,'0'0'0'0'0</inkml:trace>
+  <inkml:trace contextRef="#ctx0" brushRef="#br0">-2147483648-2147483648 8642 0 0,'0'0'0'0'0</inkml:trace>
 </inkml:ink>
 </file>
 
@@ -10758,7 +10758,7 @@
           </a:ln>
           <a:extLst>
             <a:ext uri="{C572A759-6A51-4108-AA02-DFA0A04FC94B}">
-              <ma14:wrappingTextBoxFlag xmlns="" xmlns:m="http://schemas.openxmlformats.org/officeDocument/2006/math" xmlns:a14="http://schemas.microsoft.com/office/drawing/2010/main" xmlns:ma14="http://schemas.microsoft.com/office/mac/drawingml/2011/main" val="1"/>
+              <ma14:wrappingTextBoxFlag xmlns:ma14="http://schemas.microsoft.com/office/mac/drawingml/2011/main" xmlns:a14="http://schemas.microsoft.com/office/drawing/2010/main" xmlns:m="http://schemas.openxmlformats.org/officeDocument/2006/math" xmlns="" val="1"/>
             </a:ext>
           </a:extLst>
         </p:spPr>
@@ -10821,7 +10821,7 @@
           </a:ln>
           <a:extLst>
             <a:ext uri="{C572A759-6A51-4108-AA02-DFA0A04FC94B}">
-              <ma14:wrappingTextBoxFlag xmlns="" xmlns:m="http://schemas.openxmlformats.org/officeDocument/2006/math" xmlns:a14="http://schemas.microsoft.com/office/drawing/2010/main" xmlns:ma14="http://schemas.microsoft.com/office/mac/drawingml/2011/main" val="1"/>
+              <ma14:wrappingTextBoxFlag xmlns:ma14="http://schemas.microsoft.com/office/mac/drawingml/2011/main" xmlns:a14="http://schemas.microsoft.com/office/drawing/2010/main" xmlns:m="http://schemas.openxmlformats.org/officeDocument/2006/math" xmlns="" val="1"/>
             </a:ext>
           </a:extLst>
         </p:spPr>
@@ -11927,7 +11927,7 @@
           </a:ln>
           <a:extLst>
             <a:ext uri="{C572A759-6A51-4108-AA02-DFA0A04FC94B}">
-              <ma14:wrappingTextBoxFlag xmlns="" xmlns:m="http://schemas.openxmlformats.org/officeDocument/2006/math" xmlns:a14="http://schemas.microsoft.com/office/drawing/2010/main" xmlns:ma14="http://schemas.microsoft.com/office/mac/drawingml/2011/main" val="1"/>
+              <ma14:wrappingTextBoxFlag xmlns:ma14="http://schemas.microsoft.com/office/mac/drawingml/2011/main" xmlns:a14="http://schemas.microsoft.com/office/drawing/2010/main" xmlns:m="http://schemas.openxmlformats.org/officeDocument/2006/math" xmlns="" val="1"/>
             </a:ext>
           </a:extLst>
         </p:spPr>
@@ -11993,8 +11993,8 @@
         </p:nvSpPr>
         <p:spPr>
           <a:xfrm>
-            <a:off x="6485219" y="5015511"/>
-            <a:ext cx="3606113" cy="661720"/>
+            <a:off x="7368475" y="5015511"/>
+            <a:ext cx="1839605" cy="661720"/>
           </a:xfrm>
           <a:prstGeom prst="rect">
             <a:avLst/>
@@ -12004,7 +12004,7 @@
           </a:ln>
           <a:extLst>
             <a:ext uri="{C572A759-6A51-4108-AA02-DFA0A04FC94B}">
-              <ma14:wrappingTextBoxFlag xmlns="" xmlns:m="http://schemas.openxmlformats.org/officeDocument/2006/math" xmlns:a14="http://schemas.microsoft.com/office/drawing/2010/main" xmlns:ma14="http://schemas.microsoft.com/office/mac/drawingml/2011/main" val="1"/>
+              <ma14:wrappingTextBoxFlag xmlns:ma14="http://schemas.microsoft.com/office/mac/drawingml/2011/main" xmlns:a14="http://schemas.microsoft.com/office/drawing/2010/main" xmlns:m="http://schemas.openxmlformats.org/officeDocument/2006/math" xmlns="" val="1"/>
             </a:ext>
           </a:extLst>
         </p:spPr>
@@ -12026,35 +12026,17 @@
               </a:defRPr>
             </a:pPr>
             <a:r>
-              <a:rPr lang="tr-TR" b="1" dirty="0" err="1">
-                <a:solidFill>
-                  <a:schemeClr val="bg1"/>
+              <a:rPr lang="en-US" b="1" dirty="0" smtClean="0">
+                <a:solidFill>
+                  <a:schemeClr val="tx1"/>
                 </a:solidFill>
                 <a:latin typeface="Microsoft YaHei"/>
               </a:rPr>
-              <a:t>Group</a:t>
-            </a:r>
-            <a:r>
-              <a:rPr lang="tr-TR" b="1" dirty="0">
-                <a:solidFill>
-                  <a:schemeClr val="bg1"/>
-                </a:solidFill>
-                <a:latin typeface="Microsoft YaHei"/>
-              </a:rPr>
-              <a:t> </a:t>
-            </a:r>
-            <a:r>
-              <a:rPr lang="tr-TR" b="1" dirty="0" err="1">
-                <a:solidFill>
-                  <a:schemeClr val="bg1"/>
-                </a:solidFill>
-                <a:latin typeface="Microsoft YaHei"/>
-              </a:rPr>
-              <a:t>number</a:t>
+              <a:t>Team 4</a:t>
             </a:r>
             <a:endParaRPr b="1" dirty="0">
               <a:solidFill>
-                <a:schemeClr val="bg1"/>
+                <a:schemeClr val="tx1"/>
               </a:solidFill>
               <a:latin typeface="Microsoft YaHei"/>
             </a:endParaRPr>
@@ -12067,6 +12049,13 @@
     <a:masterClrMapping/>
   </p:clrMapOvr>
   <p:transition spd="med"/>
+  <p:timing>
+    <p:tnLst>
+      <p:par>
+        <p:cTn id="1" dur="indefinite" restart="never" nodeType="tmRoot"/>
+      </p:par>
+    </p:tnLst>
+  </p:timing>
 </p:sld>
 </file>
 
@@ -12340,6 +12329,13 @@
     <a:masterClrMapping/>
   </p:clrMapOvr>
   <p:transition spd="med"/>
+  <p:timing>
+    <p:tnLst>
+      <p:par>
+        <p:cTn id="1" dur="indefinite" restart="never" nodeType="tmRoot"/>
+      </p:par>
+    </p:tnLst>
+  </p:timing>
 </p:sld>
 </file>
 
@@ -12368,7 +12364,7 @@
         </p:nvSpPr>
         <p:spPr>
           <a:xfrm>
-            <a:off x="-5486292" y="1322899"/>
+            <a:off x="55433" y="1287486"/>
             <a:ext cx="12203767" cy="5535101"/>
           </a:xfrm>
           <a:prstGeom prst="rect">
@@ -12562,8 +12558,8 @@
         </p:nvSpPr>
         <p:spPr>
           <a:xfrm>
-            <a:off x="7128101" y="1509860"/>
-            <a:ext cx="4871979" cy="4093428"/>
+            <a:off x="5921829" y="1509860"/>
+            <a:ext cx="6337370" cy="3785652"/>
           </a:xfrm>
           <a:prstGeom prst="rect">
             <a:avLst/>
@@ -12573,7 +12569,7 @@
           </a:ln>
           <a:extLst>
             <a:ext uri="{C572A759-6A51-4108-AA02-DFA0A04FC94B}">
-              <ma14:wrappingTextBoxFlag xmlns="" xmlns:m="http://schemas.openxmlformats.org/officeDocument/2006/math" xmlns:a14="http://schemas.microsoft.com/office/drawing/2010/main" xmlns:ma14="http://schemas.microsoft.com/office/mac/drawingml/2011/main" val="1"/>
+              <ma14:wrappingTextBoxFlag xmlns:ma14="http://schemas.microsoft.com/office/mac/drawingml/2011/main" xmlns:a14="http://schemas.microsoft.com/office/drawing/2010/main" xmlns:m="http://schemas.openxmlformats.org/officeDocument/2006/math" xmlns="" val="1"/>
             </a:ext>
           </a:extLst>
         </p:spPr>
@@ -12597,7 +12593,7 @@
             <a:r>
               <a:rPr lang="en-US" sz="2000" b="1" dirty="0">
                 <a:solidFill>
-                  <a:schemeClr val="bg1"/>
+                  <a:schemeClr val="tx1"/>
                 </a:solidFill>
                 <a:latin typeface="Microsoft YaHei"/>
               </a:rPr>
@@ -12606,7 +12602,7 @@
             <a:r>
               <a:rPr lang="en-US" sz="2000" b="1" dirty="0" err="1">
                 <a:solidFill>
-                  <a:schemeClr val="bg1"/>
+                  <a:schemeClr val="tx1"/>
                 </a:solidFill>
                 <a:latin typeface="Microsoft YaHei"/>
               </a:rPr>
@@ -12615,51 +12611,11 @@
             <a:r>
               <a:rPr lang="en-US" sz="2000" b="1" dirty="0">
                 <a:solidFill>
-                  <a:schemeClr val="bg1"/>
+                  <a:schemeClr val="tx1"/>
                 </a:solidFill>
                 <a:latin typeface="Microsoft YaHei"/>
               </a:rPr>
               <a:t>: Drought Impact on Cereal Production </a:t>
-            </a:r>
-          </a:p>
-          <a:p>
-            <a:pPr defTabSz="457200">
-              <a:defRPr sz="3700">
-                <a:solidFill>
-                  <a:srgbClr val="FFFFFF"/>
-                </a:solidFill>
-                <a:latin typeface="Myriad Pro Semibold"/>
-                <a:ea typeface="Myriad Pro Semibold"/>
-                <a:cs typeface="Myriad Pro Semibold"/>
-                <a:sym typeface="Myriad Pro Semibold"/>
-              </a:defRPr>
-            </a:pPr>
-            <a:r>
-              <a:rPr lang="en-US" sz="2000" b="1" dirty="0" smtClean="0">
-                <a:solidFill>
-                  <a:schemeClr val="bg1"/>
-                </a:solidFill>
-                <a:latin typeface="Microsoft YaHei"/>
-              </a:rPr>
-              <a:t>Team </a:t>
-            </a:r>
-            <a:r>
-              <a:rPr lang="en-US" sz="2000" b="1" dirty="0">
-                <a:solidFill>
-                  <a:schemeClr val="bg1"/>
-                </a:solidFill>
-                <a:latin typeface="Microsoft YaHei"/>
-              </a:rPr>
-              <a:t>4</a:t>
-            </a:r>
-            <a:r>
-              <a:rPr lang="tr-TR" sz="2000" b="1" dirty="0" smtClean="0">
-                <a:solidFill>
-                  <a:schemeClr val="bg1"/>
-                </a:solidFill>
-                <a:latin typeface="Microsoft YaHei"/>
-              </a:rPr>
-              <a:t> </a:t>
             </a:r>
           </a:p>
           <a:p>
@@ -12676,10 +12632,50 @@
             </a:pPr>
             <a:endParaRPr lang="en-US" sz="2000" b="1" dirty="0" smtClean="0">
               <a:solidFill>
-                <a:schemeClr val="bg1"/>
+                <a:schemeClr val="tx1"/>
               </a:solidFill>
               <a:latin typeface="Microsoft YaHei"/>
             </a:endParaRPr>
+          </a:p>
+          <a:p>
+            <a:pPr defTabSz="457200">
+              <a:defRPr sz="3700">
+                <a:solidFill>
+                  <a:srgbClr val="FFFFFF"/>
+                </a:solidFill>
+                <a:latin typeface="Myriad Pro Semibold"/>
+                <a:ea typeface="Myriad Pro Semibold"/>
+                <a:cs typeface="Myriad Pro Semibold"/>
+                <a:sym typeface="Myriad Pro Semibold"/>
+              </a:defRPr>
+            </a:pPr>
+            <a:r>
+              <a:rPr lang="en-US" sz="2000" b="1" dirty="0" smtClean="0">
+                <a:solidFill>
+                  <a:schemeClr val="tx1"/>
+                </a:solidFill>
+                <a:latin typeface="Microsoft YaHei"/>
+              </a:rPr>
+              <a:t>Team </a:t>
+            </a:r>
+            <a:r>
+              <a:rPr lang="en-US" sz="2000" b="1" dirty="0">
+                <a:solidFill>
+                  <a:schemeClr val="tx1"/>
+                </a:solidFill>
+                <a:latin typeface="Microsoft YaHei"/>
+              </a:rPr>
+              <a:t>4</a:t>
+            </a:r>
+            <a:r>
+              <a:rPr lang="tr-TR" sz="2000" b="1" dirty="0" smtClean="0">
+                <a:solidFill>
+                  <a:schemeClr val="tx1"/>
+                </a:solidFill>
+                <a:latin typeface="Microsoft YaHei"/>
+              </a:rPr>
+              <a:t> </a:t>
+            </a:r>
           </a:p>
           <a:p>
             <a:pPr defTabSz="457200">
@@ -12695,7 +12691,7 @@
             </a:pPr>
             <a:endParaRPr lang="en-US" sz="2000" b="1" dirty="0">
               <a:solidFill>
-                <a:schemeClr val="bg1"/>
+                <a:schemeClr val="tx1"/>
               </a:solidFill>
               <a:latin typeface="Microsoft YaHei"/>
             </a:endParaRPr>
@@ -12712,12 +12708,24 @@
                 <a:sym typeface="Myriad Pro Semibold"/>
               </a:defRPr>
             </a:pPr>
-            <a:endParaRPr lang="en-US" sz="2000" b="1" dirty="0">
-              <a:solidFill>
-                <a:schemeClr val="bg1"/>
-              </a:solidFill>
-              <a:latin typeface="Microsoft YaHei"/>
-            </a:endParaRPr>
+            <a:r>
+              <a:rPr lang="en-US" sz="2000" b="1" dirty="0">
+                <a:solidFill>
+                  <a:schemeClr val="tx1"/>
+                </a:solidFill>
+                <a:latin typeface="Microsoft YaHei"/>
+              </a:rPr>
+              <a:t>Team Members</a:t>
+            </a:r>
+            <a:r>
+              <a:rPr lang="en-US" sz="2000" b="1" dirty="0" smtClean="0">
+                <a:solidFill>
+                  <a:schemeClr val="tx1"/>
+                </a:solidFill>
+                <a:latin typeface="Microsoft YaHei"/>
+              </a:rPr>
+              <a:t>:</a:t>
+            </a:r>
           </a:p>
           <a:p>
             <a:pPr defTabSz="457200">
@@ -12734,21 +12742,27 @@
             <a:r>
               <a:rPr lang="en-US" sz="2000" b="1" dirty="0">
                 <a:solidFill>
-                  <a:schemeClr val="bg1"/>
+                  <a:schemeClr val="tx1"/>
                 </a:solidFill>
                 <a:latin typeface="Microsoft YaHei"/>
               </a:rPr>
-              <a:t>Team Members</a:t>
-            </a:r>
-            <a:r>
-              <a:rPr lang="en-US" sz="2000" b="1" dirty="0" smtClean="0">
-                <a:solidFill>
-                  <a:schemeClr val="bg1"/>
+              <a:t>- Haya </a:t>
+            </a:r>
+            <a:r>
+              <a:rPr lang="en-US" sz="2000" b="1" dirty="0" err="1">
+                <a:solidFill>
+                  <a:schemeClr val="tx1"/>
                 </a:solidFill>
                 <a:latin typeface="Microsoft YaHei"/>
               </a:rPr>
-              <a:t>:</a:t>
-            </a:r>
+              <a:t>Sukkar</a:t>
+            </a:r>
+            <a:endParaRPr lang="en-US" sz="2000" b="1" dirty="0">
+              <a:solidFill>
+                <a:schemeClr val="tx1"/>
+              </a:solidFill>
+              <a:latin typeface="Microsoft YaHei"/>
+            </a:endParaRPr>
           </a:p>
           <a:p>
             <a:pPr defTabSz="457200">
@@ -12765,24 +12779,42 @@
             <a:r>
               <a:rPr lang="en-US" sz="2000" b="1" dirty="0">
                 <a:solidFill>
-                  <a:schemeClr val="bg1"/>
+                  <a:schemeClr val="tx1"/>
                 </a:solidFill>
                 <a:latin typeface="Microsoft YaHei"/>
               </a:rPr>
-              <a:t>- Haya </a:t>
+              <a:t>- </a:t>
             </a:r>
             <a:r>
               <a:rPr lang="en-US" sz="2000" b="1" dirty="0" err="1">
                 <a:solidFill>
-                  <a:schemeClr val="bg1"/>
+                  <a:schemeClr val="tx1"/>
                 </a:solidFill>
                 <a:latin typeface="Microsoft YaHei"/>
               </a:rPr>
-              <a:t>Sukkar</a:t>
+              <a:t>Nimra</a:t>
+            </a:r>
+            <a:r>
+              <a:rPr lang="en-US" sz="2000" b="1" dirty="0">
+                <a:solidFill>
+                  <a:schemeClr val="tx1"/>
+                </a:solidFill>
+                <a:latin typeface="Microsoft YaHei"/>
+              </a:rPr>
+              <a:t> </a:t>
+            </a:r>
+            <a:r>
+              <a:rPr lang="en-US" sz="2000" b="1" dirty="0" err="1">
+                <a:solidFill>
+                  <a:schemeClr val="tx1"/>
+                </a:solidFill>
+                <a:latin typeface="Microsoft YaHei"/>
+              </a:rPr>
+              <a:t>Afzaal</a:t>
             </a:r>
             <a:endParaRPr lang="en-US" sz="2000" b="1" dirty="0">
               <a:solidFill>
-                <a:schemeClr val="bg1"/>
+                <a:schemeClr val="tx1"/>
               </a:solidFill>
               <a:latin typeface="Microsoft YaHei"/>
             </a:endParaRPr>
@@ -12802,7 +12834,7 @@
             <a:r>
               <a:rPr lang="en-US" sz="2000" b="1" dirty="0">
                 <a:solidFill>
-                  <a:schemeClr val="bg1"/>
+                  <a:schemeClr val="tx1"/>
                 </a:solidFill>
                 <a:latin typeface="Microsoft YaHei"/>
               </a:rPr>
@@ -12811,33 +12843,33 @@
             <a:r>
               <a:rPr lang="en-US" sz="2000" b="1" dirty="0" err="1">
                 <a:solidFill>
-                  <a:schemeClr val="bg1"/>
+                  <a:schemeClr val="tx1"/>
                 </a:solidFill>
                 <a:latin typeface="Microsoft YaHei"/>
               </a:rPr>
-              <a:t>Nimra</a:t>
+              <a:t>sular</a:t>
             </a:r>
             <a:r>
               <a:rPr lang="en-US" sz="2000" b="1" dirty="0">
                 <a:solidFill>
-                  <a:schemeClr val="bg1"/>
+                  <a:schemeClr val="tx1"/>
                 </a:solidFill>
                 <a:latin typeface="Microsoft YaHei"/>
               </a:rPr>
               <a:t> </a:t>
             </a:r>
             <a:r>
-              <a:rPr lang="en-US" sz="2000" b="1" dirty="0" err="1">
-                <a:solidFill>
-                  <a:schemeClr val="bg1"/>
+              <a:rPr lang="en-US" sz="2000" b="1" dirty="0" err="1" smtClean="0">
+                <a:solidFill>
+                  <a:schemeClr val="tx1"/>
                 </a:solidFill>
                 <a:latin typeface="Microsoft YaHei"/>
               </a:rPr>
-              <a:t>Afzaal</a:t>
+              <a:t>Albalkhi</a:t>
             </a:r>
             <a:endParaRPr lang="en-US" sz="2000" b="1" dirty="0">
               <a:solidFill>
-                <a:schemeClr val="bg1"/>
+                <a:schemeClr val="tx1"/>
               </a:solidFill>
               <a:latin typeface="Microsoft YaHei"/>
             </a:endParaRPr>
@@ -12855,44 +12887,44 @@
               </a:defRPr>
             </a:pPr>
             <a:r>
-              <a:rPr lang="en-US" sz="2000" b="1" dirty="0">
-                <a:solidFill>
-                  <a:schemeClr val="bg1"/>
+              <a:rPr lang="en-US" sz="2000" b="1" dirty="0" smtClean="0">
+                <a:solidFill>
+                  <a:schemeClr val="tx1"/>
                 </a:solidFill>
                 <a:latin typeface="Microsoft YaHei"/>
               </a:rPr>
               <a:t>- </a:t>
             </a:r>
             <a:r>
-              <a:rPr lang="en-US" sz="2000" b="1" dirty="0" err="1">
-                <a:solidFill>
-                  <a:schemeClr val="bg1"/>
+              <a:rPr lang="en-US" sz="2000" b="1" dirty="0" err="1" smtClean="0">
+                <a:solidFill>
+                  <a:schemeClr val="tx1"/>
                 </a:solidFill>
                 <a:latin typeface="Microsoft YaHei"/>
               </a:rPr>
-              <a:t>sular</a:t>
-            </a:r>
-            <a:r>
-              <a:rPr lang="en-US" sz="2000" b="1" dirty="0">
-                <a:solidFill>
-                  <a:schemeClr val="bg1"/>
+              <a:t>Abdulrahman</a:t>
+            </a:r>
+            <a:r>
+              <a:rPr lang="en-US" sz="2000" b="1" dirty="0" smtClean="0">
+                <a:solidFill>
+                  <a:schemeClr val="tx1"/>
                 </a:solidFill>
                 <a:latin typeface="Microsoft YaHei"/>
               </a:rPr>
               <a:t> </a:t>
             </a:r>
             <a:r>
-              <a:rPr lang="en-US" sz="2000" b="1" dirty="0" err="1" smtClean="0">
-                <a:solidFill>
-                  <a:schemeClr val="bg1"/>
+              <a:rPr lang="en-US" sz="2000" b="1" dirty="0" err="1">
+                <a:solidFill>
+                  <a:schemeClr val="tx1"/>
                 </a:solidFill>
                 <a:latin typeface="Microsoft YaHei"/>
               </a:rPr>
-              <a:t>Albalkhi</a:t>
+              <a:t>Abdulkader</a:t>
             </a:r>
             <a:endParaRPr lang="en-US" sz="2000" b="1" dirty="0">
               <a:solidFill>
-                <a:schemeClr val="bg1"/>
+                <a:schemeClr val="tx1"/>
               </a:solidFill>
               <a:latin typeface="Microsoft YaHei"/>
             </a:endParaRPr>
@@ -12912,42 +12944,24 @@
             <a:r>
               <a:rPr lang="en-US" sz="2000" b="1" dirty="0" smtClean="0">
                 <a:solidFill>
-                  <a:schemeClr val="bg1"/>
+                  <a:schemeClr val="tx1"/>
                 </a:solidFill>
                 <a:latin typeface="Microsoft YaHei"/>
               </a:rPr>
-              <a:t>- </a:t>
+              <a:t>- Ahmad </a:t>
             </a:r>
             <a:r>
               <a:rPr lang="en-US" sz="2000" b="1" dirty="0" err="1" smtClean="0">
                 <a:solidFill>
-                  <a:schemeClr val="bg1"/>
+                  <a:schemeClr val="tx1"/>
                 </a:solidFill>
                 <a:latin typeface="Microsoft YaHei"/>
               </a:rPr>
-              <a:t>Abdulrahman</a:t>
-            </a:r>
-            <a:r>
-              <a:rPr lang="en-US" sz="2000" b="1" dirty="0" smtClean="0">
-                <a:solidFill>
-                  <a:schemeClr val="bg1"/>
-                </a:solidFill>
-                <a:latin typeface="Microsoft YaHei"/>
-              </a:rPr>
-              <a:t> </a:t>
-            </a:r>
-            <a:r>
-              <a:rPr lang="en-US" sz="2000" b="1" dirty="0" err="1">
-                <a:solidFill>
-                  <a:schemeClr val="bg1"/>
-                </a:solidFill>
-                <a:latin typeface="Microsoft YaHei"/>
-              </a:rPr>
-              <a:t>Abdulkader</a:t>
+              <a:t>Deeb</a:t>
             </a:r>
             <a:endParaRPr lang="en-US" sz="2000" b="1" dirty="0">
               <a:solidFill>
-                <a:schemeClr val="bg1"/>
+                <a:schemeClr val="tx1"/>
               </a:solidFill>
               <a:latin typeface="Microsoft YaHei"/>
             </a:endParaRPr>
@@ -12967,44 +12981,7 @@
             <a:r>
               <a:rPr lang="en-US" sz="2000" b="1" dirty="0" smtClean="0">
                 <a:solidFill>
-                  <a:schemeClr val="bg1"/>
-                </a:solidFill>
-                <a:latin typeface="Microsoft YaHei"/>
-              </a:rPr>
-              <a:t>- Ahmad </a:t>
-            </a:r>
-            <a:r>
-              <a:rPr lang="en-US" sz="2000" b="1" dirty="0" err="1" smtClean="0">
-                <a:solidFill>
-                  <a:schemeClr val="bg1"/>
-                </a:solidFill>
-                <a:latin typeface="Microsoft YaHei"/>
-              </a:rPr>
-              <a:t>Deeb</a:t>
-            </a:r>
-            <a:endParaRPr lang="en-US" sz="2000" b="1" dirty="0">
-              <a:solidFill>
-                <a:schemeClr val="bg1"/>
-              </a:solidFill>
-              <a:latin typeface="Microsoft YaHei"/>
-            </a:endParaRPr>
-          </a:p>
-          <a:p>
-            <a:pPr defTabSz="457200">
-              <a:defRPr sz="3700">
-                <a:solidFill>
-                  <a:srgbClr val="FFFFFF"/>
-                </a:solidFill>
-                <a:latin typeface="Myriad Pro Semibold"/>
-                <a:ea typeface="Myriad Pro Semibold"/>
-                <a:cs typeface="Myriad Pro Semibold"/>
-                <a:sym typeface="Myriad Pro Semibold"/>
-              </a:defRPr>
-            </a:pPr>
-            <a:r>
-              <a:rPr lang="en-US" sz="2000" b="1" dirty="0" smtClean="0">
-                <a:solidFill>
-                  <a:schemeClr val="bg1"/>
+                  <a:schemeClr val="tx1"/>
                 </a:solidFill>
                 <a:latin typeface="Microsoft YaHei"/>
               </a:rPr>
@@ -13013,7 +12990,7 @@
             <a:r>
               <a:rPr lang="en-US" sz="2000" b="1" dirty="0" err="1" smtClean="0">
                 <a:solidFill>
-                  <a:schemeClr val="bg1"/>
+                  <a:schemeClr val="tx1"/>
                 </a:solidFill>
                 <a:latin typeface="Microsoft YaHei"/>
               </a:rPr>
@@ -13022,7 +12999,7 @@
             <a:r>
               <a:rPr lang="en-US" sz="2000" b="1" dirty="0" smtClean="0">
                 <a:solidFill>
-                  <a:schemeClr val="bg1"/>
+                  <a:schemeClr val="tx1"/>
                 </a:solidFill>
                 <a:latin typeface="Microsoft YaHei"/>
               </a:rPr>
@@ -13031,7 +13008,7 @@
             <a:r>
               <a:rPr lang="en-US" sz="2000" b="1" dirty="0" err="1" smtClean="0">
                 <a:solidFill>
-                  <a:schemeClr val="bg1"/>
+                  <a:schemeClr val="tx1"/>
                 </a:solidFill>
                 <a:latin typeface="Microsoft YaHei"/>
               </a:rPr>
@@ -13039,7 +13016,7 @@
             </a:r>
             <a:endParaRPr lang="en-US" sz="2000" b="1" dirty="0">
               <a:solidFill>
-                <a:schemeClr val="bg1"/>
+                <a:schemeClr val="tx1"/>
               </a:solidFill>
               <a:latin typeface="Microsoft YaHei"/>
             </a:endParaRPr>
@@ -13057,6 +13034,13 @@
     <a:masterClrMapping/>
   </p:clrMapOvr>
   <p:transition spd="med"/>
+  <p:timing>
+    <p:tnLst>
+      <p:par>
+        <p:cTn id="1" dur="indefinite" restart="never" nodeType="tmRoot"/>
+      </p:par>
+    </p:tnLst>
+  </p:timing>
 </p:sld>
 </file>
 
@@ -13089,8 +13073,8 @@
         </p:nvSpPr>
         <p:spPr>
           <a:xfrm>
-            <a:off x="640854" y="2951018"/>
-            <a:ext cx="11202803" cy="3173252"/>
+            <a:off x="640854" y="3160773"/>
+            <a:ext cx="11202803" cy="2156563"/>
           </a:xfrm>
           <a:prstGeom prst="rect">
             <a:avLst/>
@@ -13144,8 +13128,17 @@
               <a:rPr lang="en-US" sz="1600" dirty="0">
                 <a:sym typeface="Merriweather Sans Light"/>
               </a:rPr>
-              <a:t> web service, and a Power BI dashboard.</a:t>
-            </a:r>
+              <a:t> web service, and a Power BI dashboard</a:t>
+            </a:r>
+            <a:r>
+              <a:rPr lang="en-US" sz="1600" dirty="0" smtClean="0">
+                <a:sym typeface="Merriweather Sans Light"/>
+              </a:rPr>
+              <a:t>.</a:t>
+            </a:r>
+            <a:endParaRPr lang="en-US" sz="1600" dirty="0">
+              <a:sym typeface="Merriweather Sans Light"/>
+            </a:endParaRPr>
           </a:p>
           <a:p>
             <a:pPr>
@@ -13162,6 +13155,42 @@
                 <a:sym typeface="Merriweather Sans Light"/>
               </a:defRPr>
             </a:pPr>
+            <a:r>
+              <a:rPr lang="en-US" sz="1600" dirty="0">
+                <a:sym typeface="Merriweather Sans Light"/>
+              </a:rPr>
+              <a:t>Importance: Syria's 2024–2025 drought cut rainfall by over 50%, collapsing wheat production to 900,000 </a:t>
+            </a:r>
+            <a:r>
+              <a:rPr lang="en-US" sz="1600" dirty="0" err="1">
+                <a:sym typeface="Merriweather Sans Light"/>
+              </a:rPr>
+              <a:t>tonnes</a:t>
+            </a:r>
+            <a:r>
+              <a:rPr lang="en-US" sz="1600" dirty="0">
+                <a:sym typeface="Merriweather Sans Light"/>
+              </a:rPr>
+              <a:t> and leaving a 3 million </a:t>
+            </a:r>
+            <a:r>
+              <a:rPr lang="en-US" sz="1600" dirty="0" err="1">
+                <a:sym typeface="Merriweather Sans Light"/>
+              </a:rPr>
+              <a:t>tonne</a:t>
+            </a:r>
+            <a:r>
+              <a:rPr lang="en-US" sz="1600" dirty="0">
+                <a:sym typeface="Merriweather Sans Light"/>
+              </a:rPr>
+              <a:t> deficit that pushed millions into food insecurity — proving that climate-driven crop failures are a present emergency, not a future risk</a:t>
+            </a:r>
+            <a:r>
+              <a:rPr lang="en-US" sz="1600" dirty="0" smtClean="0">
+                <a:sym typeface="Merriweather Sans Light"/>
+              </a:rPr>
+              <a:t>.</a:t>
+            </a:r>
             <a:endParaRPr lang="en-US" sz="1600" dirty="0">
               <a:sym typeface="Merriweather Sans Light"/>
             </a:endParaRPr>
@@ -13185,72 +13214,19 @@
               <a:rPr lang="en-US" sz="1600" dirty="0">
                 <a:sym typeface="Merriweather Sans Light"/>
               </a:rPr>
-              <a:t>Importance: Syria's 2024–2025 drought cut rainfall by over 50%, collapsing wheat production to 900,000 </a:t>
-            </a:r>
-            <a:r>
-              <a:rPr lang="en-US" sz="1600" dirty="0" err="1">
+              <a:t>Objectives: </a:t>
+            </a:r>
+            <a:r>
+              <a:rPr lang="en-US" sz="1600" dirty="0" smtClean="0">
                 <a:sym typeface="Merriweather Sans Light"/>
               </a:rPr>
-              <a:t>tonnes</a:t>
+              <a:t>Build </a:t>
             </a:r>
             <a:r>
               <a:rPr lang="en-US" sz="1600" dirty="0">
                 <a:sym typeface="Merriweather Sans Light"/>
               </a:rPr>
-              <a:t> and leaving a 3 million </a:t>
-            </a:r>
-            <a:r>
-              <a:rPr lang="en-US" sz="1600" dirty="0" err="1">
-                <a:sym typeface="Merriweather Sans Light"/>
-              </a:rPr>
-              <a:t>tonne</a:t>
-            </a:r>
-            <a:r>
-              <a:rPr lang="en-US" sz="1600" dirty="0">
-                <a:sym typeface="Merriweather Sans Light"/>
-              </a:rPr>
-              <a:t> deficit that pushed millions into food insecurity — proving that climate-driven crop failures are a present emergency, not a future risk.</a:t>
-            </a:r>
-          </a:p>
-          <a:p>
-            <a:pPr>
-              <a:lnSpc>
-                <a:spcPct val="100000"/>
-              </a:lnSpc>
-              <a:defRPr sz="1400">
-                <a:solidFill>
-                  <a:srgbClr val="000000"/>
-                </a:solidFill>
-                <a:latin typeface="Merriweather Sans Light"/>
-                <a:ea typeface="Merriweather Sans Light"/>
-                <a:cs typeface="Merriweather Sans Light"/>
-                <a:sym typeface="Merriweather Sans Light"/>
-              </a:defRPr>
-            </a:pPr>
-            <a:endParaRPr lang="en-US" sz="1600" dirty="0">
-              <a:sym typeface="Merriweather Sans Light"/>
-            </a:endParaRPr>
-          </a:p>
-          <a:p>
-            <a:pPr>
-              <a:lnSpc>
-                <a:spcPct val="100000"/>
-              </a:lnSpc>
-              <a:defRPr sz="1400">
-                <a:solidFill>
-                  <a:srgbClr val="000000"/>
-                </a:solidFill>
-                <a:latin typeface="Merriweather Sans Light"/>
-                <a:ea typeface="Merriweather Sans Light"/>
-                <a:cs typeface="Merriweather Sans Light"/>
-                <a:sym typeface="Merriweather Sans Light"/>
-              </a:defRPr>
-            </a:pPr>
-            <a:r>
-              <a:rPr lang="en-US" sz="1600" dirty="0">
-                <a:sym typeface="Merriweather Sans Light"/>
-              </a:rPr>
-              <a:t>Objectives: Build a reproducible data pipeline, quantify rainfall–yield relationships, distinguish climate-driven yield losses from non-climate area changes, train a predictive model, deploy a public API and dashboard, and propose an early-warning framework for agricultural planners.</a:t>
+              <a:t>a reproducible data pipeline, quantify rainfall–yield relationships, distinguish climate-driven yield losses from non-climate area changes, train a predictive model, deploy a public API and dashboard, and propose an early-warning framework for agricultural planners.</a:t>
             </a:r>
             <a:endParaRPr lang="en-US" sz="1800" dirty="0">
               <a:latin typeface="Microsoft YaHei Light"/>
@@ -13689,6 +13665,102 @@
           </p:pic>
         </mc:Fallback>
       </mc:AlternateContent>
+      <p:sp>
+        <p:nvSpPr>
+          <p:cNvPr id="3" name="TextBox 2"/>
+          <p:cNvSpPr txBox="1"/>
+          <p:nvPr/>
+        </p:nvSpPr>
+        <p:spPr>
+          <a:xfrm>
+            <a:off x="859313" y="5605276"/>
+            <a:ext cx="10830403" cy="923328"/>
+          </a:xfrm>
+          <a:prstGeom prst="rect">
+            <a:avLst/>
+          </a:prstGeom>
+          <a:ln/>
+        </p:spPr>
+        <p:style>
+          <a:lnRef idx="2">
+            <a:schemeClr val="accent2"/>
+          </a:lnRef>
+          <a:fillRef idx="1">
+            <a:schemeClr val="lt1"/>
+          </a:fillRef>
+          <a:effectRef idx="0">
+            <a:schemeClr val="accent2"/>
+          </a:effectRef>
+          <a:fontRef idx="minor">
+            <a:schemeClr val="dk1"/>
+          </a:fontRef>
+        </p:style>
+        <p:txBody>
+          <a:bodyPr rot="0" spcFirstLastPara="1" vertOverflow="overflow" horzOverflow="overflow" vert="horz" wrap="square" lIns="45719" tIns="45719" rIns="45719" bIns="45719" numCol="1" spcCol="38100" rtlCol="0" anchor="t">
+            <a:spAutoFit/>
+          </a:bodyPr>
+          <a:lstStyle/>
+          <a:p>
+            <a:r>
+              <a:rPr lang="en-US" dirty="0" smtClean="0">
+                <a:solidFill>
+                  <a:schemeClr val="bg1">
+                    <a:lumMod val="50000"/>
+                  </a:schemeClr>
+                </a:solidFill>
+              </a:rPr>
+              <a:t>Main Question:</a:t>
+            </a:r>
+          </a:p>
+          <a:p>
+            <a:r>
+              <a:rPr lang="en-US" dirty="0" smtClean="0">
+                <a:solidFill>
+                  <a:schemeClr val="bg1">
+                    <a:lumMod val="50000"/>
+                  </a:schemeClr>
+                </a:solidFill>
+              </a:rPr>
+              <a:t>How </a:t>
+            </a:r>
+            <a:r>
+              <a:rPr lang="en-US" dirty="0">
+                <a:solidFill>
+                  <a:schemeClr val="bg1">
+                    <a:lumMod val="50000"/>
+                  </a:schemeClr>
+                </a:solidFill>
+              </a:rPr>
+              <a:t>has rainfall variability between 1991 and 2025 affected wheat and barley production in Syria, and </a:t>
+            </a:r>
+          </a:p>
+          <a:p>
+            <a:r>
+              <a:rPr lang="en-US" dirty="0">
+                <a:solidFill>
+                  <a:schemeClr val="bg1">
+                    <a:lumMod val="50000"/>
+                  </a:schemeClr>
+                </a:solidFill>
+              </a:rPr>
+              <a:t>what precipitation thresholds predict crop failure? </a:t>
+            </a:r>
+            <a:endParaRPr kumimoji="0" lang="en-US" sz="1800" b="0" i="0" u="none" strike="noStrike" cap="none" spc="0" normalizeH="0" baseline="0" dirty="0">
+              <a:ln>
+                <a:noFill/>
+              </a:ln>
+              <a:solidFill>
+                <a:schemeClr val="bg1">
+                  <a:lumMod val="50000"/>
+                </a:schemeClr>
+              </a:solidFill>
+              <a:effectLst/>
+              <a:uFillTx/>
+              <a:sym typeface="Calibri"/>
+            </a:endParaRPr>
+          </a:p>
+        </p:txBody>
+      </p:sp>
     </p:spTree>
     <p:extLst>
       <p:ext uri="{BB962C8B-B14F-4D97-AF65-F5344CB8AC3E}">
@@ -13700,6 +13772,13 @@
     <a:masterClrMapping/>
   </p:clrMapOvr>
   <p:transition spd="med"/>
+  <p:timing>
+    <p:tnLst>
+      <p:par>
+        <p:cTn id="1" dur="indefinite" restart="never" nodeType="tmRoot"/>
+      </p:par>
+    </p:tnLst>
+  </p:timing>
 </p:sld>
 </file>
 
@@ -13733,7 +13812,7 @@
         <p:spPr>
           <a:xfrm>
             <a:off x="640854" y="2951018"/>
-            <a:ext cx="8007631" cy="3173252"/>
+            <a:ext cx="10561067" cy="3173252"/>
           </a:xfrm>
           <a:prstGeom prst="rect">
             <a:avLst/>
@@ -13777,47 +13856,162 @@
               </a:rPr>
               <a:t> directly supports </a:t>
             </a:r>
+            <a:endParaRPr lang="en-US" sz="1600" dirty="0" smtClean="0">
+              <a:sym typeface="Merriweather Sans Light"/>
+            </a:endParaRPr>
+          </a:p>
+          <a:p>
+            <a:pPr>
+              <a:lnSpc>
+                <a:spcPct val="100000"/>
+              </a:lnSpc>
+              <a:defRPr sz="1400">
+                <a:solidFill>
+                  <a:srgbClr val="000000"/>
+                </a:solidFill>
+                <a:latin typeface="Merriweather Sans Light"/>
+                <a:ea typeface="Merriweather Sans Light"/>
+                <a:cs typeface="Merriweather Sans Light"/>
+                <a:sym typeface="Merriweather Sans Light"/>
+              </a:defRPr>
+            </a:pPr>
+            <a:r>
+              <a:rPr lang="en-US" sz="1600" b="1" dirty="0" smtClean="0">
+                <a:sym typeface="Merriweather Sans Light"/>
+              </a:rPr>
+              <a:t>-</a:t>
+            </a:r>
+            <a:r>
+              <a:rPr lang="en-US" sz="1600" b="1" dirty="0" smtClean="0">
+                <a:sym typeface="Merriweather Sans Light"/>
+              </a:rPr>
+              <a:t>SDG </a:t>
+            </a:r>
             <a:r>
               <a:rPr lang="en-US" sz="1600" b="1" dirty="0">
                 <a:sym typeface="Merriweather Sans Light"/>
               </a:rPr>
-              <a:t>SDG 2 (Zero Hunger)</a:t>
+              <a:t>2 (Zero Hunger)</a:t>
             </a:r>
             <a:r>
               <a:rPr lang="en-US" sz="1600" dirty="0">
                 <a:sym typeface="Merriweather Sans Light"/>
               </a:rPr>
-              <a:t> by quantifying how climate-driven rainfall deficits undermine wheat production and food security in Syria, </a:t>
+              <a:t> by quantifying how climate-driven rainfall deficits undermine wheat production and food security in </a:t>
+            </a:r>
+            <a:r>
+              <a:rPr lang="en-US" sz="1600" dirty="0" smtClean="0">
+                <a:sym typeface="Merriweather Sans Light"/>
+              </a:rPr>
+              <a:t>Syria</a:t>
+            </a:r>
+          </a:p>
+          <a:p>
+            <a:pPr>
+              <a:lnSpc>
+                <a:spcPct val="100000"/>
+              </a:lnSpc>
+              <a:defRPr sz="1400">
+                <a:solidFill>
+                  <a:srgbClr val="000000"/>
+                </a:solidFill>
+                <a:latin typeface="Merriweather Sans Light"/>
+                <a:ea typeface="Merriweather Sans Light"/>
+                <a:cs typeface="Merriweather Sans Light"/>
+                <a:sym typeface="Merriweather Sans Light"/>
+              </a:defRPr>
+            </a:pPr>
+            <a:r>
+              <a:rPr lang="en-US" sz="1600" b="1" dirty="0" smtClean="0">
+                <a:sym typeface="Merriweather Sans Light"/>
+              </a:rPr>
+              <a:t>SDG </a:t>
             </a:r>
             <a:r>
               <a:rPr lang="en-US" sz="1600" b="1" dirty="0">
                 <a:sym typeface="Merriweather Sans Light"/>
               </a:rPr>
-              <a:t>SDG 13 (Climate Action)</a:t>
+              <a:t>13 (Climate Action)</a:t>
             </a:r>
             <a:r>
               <a:rPr lang="en-US" sz="1600" dirty="0">
                 <a:sym typeface="Merriweather Sans Light"/>
               </a:rPr>
-              <a:t> by translating open climate data into a usable early-warning tool for drought response, and </a:t>
+              <a:t> by translating open climate data into a usable early-warning tool for drought </a:t>
+            </a:r>
+            <a:r>
+              <a:rPr lang="en-US" sz="1600" dirty="0" smtClean="0">
+                <a:sym typeface="Merriweather Sans Light"/>
+              </a:rPr>
+              <a:t>response</a:t>
+            </a:r>
+          </a:p>
+          <a:p>
+            <a:pPr>
+              <a:lnSpc>
+                <a:spcPct val="100000"/>
+              </a:lnSpc>
+              <a:defRPr sz="1400">
+                <a:solidFill>
+                  <a:srgbClr val="000000"/>
+                </a:solidFill>
+                <a:latin typeface="Merriweather Sans Light"/>
+                <a:ea typeface="Merriweather Sans Light"/>
+                <a:cs typeface="Merriweather Sans Light"/>
+                <a:sym typeface="Merriweather Sans Light"/>
+              </a:defRPr>
+            </a:pPr>
+            <a:r>
+              <a:rPr lang="en-US" sz="1600" b="1" dirty="0" smtClean="0">
+                <a:sym typeface="Merriweather Sans Light"/>
+              </a:rPr>
+              <a:t>SDG </a:t>
             </a:r>
             <a:r>
               <a:rPr lang="en-US" sz="1600" b="1" dirty="0">
                 <a:sym typeface="Merriweather Sans Light"/>
               </a:rPr>
-              <a:t>SDG 6 (Clean Water and Sanitation)</a:t>
+              <a:t>6 (Clean Water and Sanitation)</a:t>
             </a:r>
             <a:r>
               <a:rPr lang="en-US" sz="1600" dirty="0">
                 <a:sym typeface="Merriweather Sans Light"/>
               </a:rPr>
-              <a:t> by highlighting the critical role of rainfall variability in agricultural water availability — while indirectly contributing to </a:t>
+              <a:t> by highlighting the critical role of rainfall variability in agricultural water </a:t>
+            </a:r>
+            <a:r>
+              <a:rPr lang="en-US" sz="1600" dirty="0" smtClean="0">
+                <a:sym typeface="Merriweather Sans Light"/>
+              </a:rPr>
+              <a:t>availability</a:t>
+            </a:r>
+          </a:p>
+          <a:p>
+            <a:pPr>
+              <a:lnSpc>
+                <a:spcPct val="100000"/>
+              </a:lnSpc>
+              <a:defRPr sz="1400">
+                <a:solidFill>
+                  <a:srgbClr val="000000"/>
+                </a:solidFill>
+                <a:latin typeface="Merriweather Sans Light"/>
+                <a:ea typeface="Merriweather Sans Light"/>
+                <a:cs typeface="Merriweather Sans Light"/>
+                <a:sym typeface="Merriweather Sans Light"/>
+              </a:defRPr>
+            </a:pPr>
+            <a:r>
+              <a:rPr lang="en-US" sz="1600" b="1" dirty="0" smtClean="0">
+                <a:sym typeface="Merriweather Sans Light"/>
+              </a:rPr>
+              <a:t>SDG </a:t>
             </a:r>
             <a:r>
               <a:rPr lang="en-US" sz="1600" b="1" dirty="0">
                 <a:sym typeface="Merriweather Sans Light"/>
               </a:rPr>
-              <a:t>SDG 15 (Life on Land)</a:t>
+              <a:t>15 (Life on Land)</a:t>
             </a:r>
             <a:r>
               <a:rPr lang="en-US" sz="1600" dirty="0">
@@ -14273,6 +14467,13 @@
     <a:masterClrMapping/>
   </p:clrMapOvr>
   <p:transition spd="med"/>
+  <p:timing>
+    <p:tnLst>
+      <p:par>
+        <p:cTn id="1" dur="indefinite" restart="never" nodeType="tmRoot"/>
+      </p:par>
+    </p:tnLst>
+  </p:timing>
 </p:sld>
 </file>
 
@@ -14318,7 +14519,7 @@
         <p:spPr>
           <a:xfrm>
             <a:off x="640854" y="2951018"/>
-            <a:ext cx="8916803" cy="3173252"/>
+            <a:ext cx="10692496" cy="3173252"/>
           </a:xfrm>
           <a:prstGeom prst="rect">
             <a:avLst/>
@@ -14345,13 +14546,7 @@
               </a:defRPr>
             </a:pPr>
             <a:r>
-              <a:rPr lang="tr-TR" sz="1600" dirty="0" smtClean="0">
-                <a:latin typeface="Microsoft YaHei Light"/>
-              </a:rPr>
-              <a:t>-</a:t>
-            </a:r>
-            <a:r>
-              <a:rPr lang="en-US" sz="1400" dirty="0">
+              <a:rPr lang="en-US" sz="1400" dirty="0" smtClean="0">
                 <a:sym typeface="Merriweather Sans Light"/>
               </a:rPr>
               <a:t>Syria </a:t>
@@ -14368,12 +14563,9 @@
               </a:rPr>
               <a:t> delivers an integrated early-warning solution composed of four connected elements: </a:t>
             </a:r>
-            <a:endParaRPr lang="en-US" sz="1400" dirty="0">
-              <a:sym typeface="Merriweather Sans Light"/>
-            </a:endParaRPr>
-          </a:p>
-          <a:p>
-            <a:pPr>
+          </a:p>
+          <a:p>
+            <a:pPr lvl="1">
               <a:lnSpc>
                 <a:spcPct val="100000"/>
               </a:lnSpc>
@@ -14391,13 +14583,19 @@
               <a:rPr lang="en-US" sz="1400" dirty="0" smtClean="0">
                 <a:sym typeface="Merriweather Sans Light"/>
               </a:rPr>
-              <a:t> 	</a:t>
+              <a:t> </a:t>
+            </a:r>
+            <a:r>
+              <a:rPr lang="en-US" sz="1400" b="1" dirty="0">
+                <a:sym typeface="Merriweather Sans Light"/>
+              </a:rPr>
+              <a:t>R</a:t>
             </a:r>
             <a:r>
               <a:rPr lang="en-US" sz="1400" b="1" dirty="0" smtClean="0">
                 <a:sym typeface="Merriweather Sans Light"/>
               </a:rPr>
-              <a:t>reproducible </a:t>
+              <a:t>eproducible </a:t>
             </a:r>
             <a:r>
               <a:rPr lang="en-US" sz="1400" b="1" dirty="0">
@@ -14543,9 +14741,6 @@
               </a:rPr>
               <a:t>, rainfall–yield scatter plots, and year filters. </a:t>
             </a:r>
-            <a:endParaRPr lang="en-US" sz="1400" dirty="0">
-              <a:sym typeface="Merriweather Sans Light"/>
-            </a:endParaRPr>
           </a:p>
           <a:p>
             <a:pPr>
@@ -15027,6 +15222,13 @@
     <a:masterClrMapping/>
   </p:clrMapOvr>
   <p:transition spd="med"/>
+  <p:timing>
+    <p:tnLst>
+      <p:par>
+        <p:cTn id="1" dur="indefinite" restart="never" nodeType="tmRoot"/>
+      </p:par>
+    </p:tnLst>
+  </p:timing>
 </p:sld>
 </file>
 
@@ -15071,13 +15273,27 @@
         </p:nvSpPr>
         <p:spPr>
           <a:xfrm>
-            <a:off x="640855" y="2951018"/>
-            <a:ext cx="4649602" cy="3173252"/>
-          </a:xfrm>
-          <a:prstGeom prst="rect">
-            <a:avLst/>
-          </a:prstGeom>
-        </p:spPr>
+            <a:off x="698305" y="2951018"/>
+            <a:ext cx="5041489" cy="3173252"/>
+          </a:xfrm>
+          <a:prstGeom prst="rect">
+            <a:avLst/>
+          </a:prstGeom>
+        </p:spPr>
+        <p:style>
+          <a:lnRef idx="2">
+            <a:schemeClr val="accent2"/>
+          </a:lnRef>
+          <a:fillRef idx="1">
+            <a:schemeClr val="lt1"/>
+          </a:fillRef>
+          <a:effectRef idx="0">
+            <a:schemeClr val="accent2"/>
+          </a:effectRef>
+          <a:fontRef idx="minor">
+            <a:schemeClr val="dk1"/>
+          </a:fontRef>
+        </p:style>
         <p:txBody>
           <a:bodyPr lIns="45719" tIns="45720" rIns="45719" bIns="45720" anchor="ctr">
             <a:noAutofit/>
@@ -15145,27 +15361,8 @@
                 <a:ea typeface="Merriweather Sans Light"/>
                 <a:cs typeface="Merriweather Sans Light"/>
               </a:rPr>
-              <a:t>Selected topic (Agriculture &amp; Food Systems), framed the research question, identified datasets (NASA POWER, HDX, FAOSTAT), submitted the Problem Statement by the 29 Sep 21:00 deadline</a:t>
-            </a:r>
-            <a:r>
-              <a:rPr lang="en-US" sz="1400" dirty="0">
-                <a:solidFill>
-                  <a:srgbClr val="000000"/>
-                </a:solidFill>
-                <a:latin typeface="Merriweather Sans Light"/>
-                <a:ea typeface="Merriweather Sans Light"/>
-                <a:cs typeface="Merriweather Sans Light"/>
-              </a:rPr>
-              <a:t>.</a:t>
-            </a:r>
-            <a:endParaRPr lang="en-US" sz="1400" dirty="0">
-              <a:solidFill>
-                <a:srgbClr val="000000"/>
-              </a:solidFill>
-              <a:latin typeface="Merriweather Sans Light"/>
-              <a:ea typeface="Merriweather Sans Light"/>
-              <a:cs typeface="Merriweather Sans Light"/>
-            </a:endParaRPr>
+              <a:t>Selected topic (Agriculture &amp; Food Systems), framed the research question, identified datasets (NASA POWER, HDX, FAOSTAT), submitted the Problem Statement by the 29 Sep 21:00 deadline.</a:t>
+            </a:r>
           </a:p>
           <a:p>
             <a:pPr>
@@ -15240,27 +15437,8 @@
                 <a:ea typeface="Merriweather Sans Light"/>
                 <a:cs typeface="Merriweather Sans Light"/>
               </a:rPr>
-              <a:t> correction, HDX rainfall aggregation to growing seasons, FAOSTAT production pivot, and inner-merge on year into a 34-year panel. Ran initial correlation analysis and exploratory visualizations</a:t>
-            </a:r>
-            <a:r>
-              <a:rPr lang="en-US" sz="1400" dirty="0">
-                <a:solidFill>
-                  <a:srgbClr val="000000"/>
-                </a:solidFill>
-                <a:latin typeface="Merriweather Sans Light"/>
-                <a:ea typeface="Merriweather Sans Light"/>
-                <a:cs typeface="Merriweather Sans Light"/>
-              </a:rPr>
-              <a:t>.</a:t>
-            </a:r>
-            <a:endParaRPr lang="en-US" sz="1400" dirty="0">
-              <a:solidFill>
-                <a:srgbClr val="000000"/>
-              </a:solidFill>
-              <a:latin typeface="Merriweather Sans Light"/>
-              <a:ea typeface="Merriweather Sans Light"/>
-              <a:cs typeface="Merriweather Sans Light"/>
-            </a:endParaRPr>
+              <a:t> correction, HDX rainfall aggregation to growing seasons, FAOSTAT production pivot, and inner-merge on year into a 34-year panel. Ran initial correlation analysis and exploratory visualizations.</a:t>
+            </a:r>
           </a:p>
         </p:txBody>
       </p:sp>
@@ -15712,21 +15890,33 @@
         </p:nvSpPr>
         <p:spPr>
           <a:xfrm>
-            <a:off x="6105047" y="2994672"/>
+            <a:off x="6016856" y="2951018"/>
             <a:ext cx="5672860" cy="3173252"/>
           </a:xfrm>
           <a:prstGeom prst="rect">
             <a:avLst/>
           </a:prstGeom>
-          <a:ln w="12700">
-            <a:miter lim="400000"/>
-          </a:ln>
+          <a:ln/>
           <a:extLst>
             <a:ext uri="{C572A759-6A51-4108-AA02-DFA0A04FC94B}">
-              <ma14:wrappingTextBoxFlag xmlns="" xmlns:m="http://schemas.openxmlformats.org/officeDocument/2006/math" xmlns:a14="http://schemas.microsoft.com/office/drawing/2010/main" xmlns:ma14="http://schemas.microsoft.com/office/mac/drawingml/2011/main" val="1"/>
+              <ma14:wrappingTextBoxFlag xmlns:ma14="http://schemas.microsoft.com/office/mac/drawingml/2011/main" xmlns:a14="http://schemas.microsoft.com/office/drawing/2010/main" xmlns:m="http://schemas.openxmlformats.org/officeDocument/2006/math" xmlns="" val="1"/>
             </a:ext>
           </a:extLst>
         </p:spPr>
+        <p:style>
+          <a:lnRef idx="2">
+            <a:schemeClr val="accent2"/>
+          </a:lnRef>
+          <a:fillRef idx="1">
+            <a:schemeClr val="lt1"/>
+          </a:fillRef>
+          <a:effectRef idx="0">
+            <a:schemeClr val="accent2"/>
+          </a:effectRef>
+          <a:fontRef idx="minor">
+            <a:schemeClr val="dk1"/>
+          </a:fontRef>
+        </p:style>
         <p:txBody>
           <a:bodyPr lIns="45719" tIns="45720" rIns="45719" bIns="45720" anchor="ctr">
             <a:noAutofit/>
@@ -16175,15 +16365,6 @@
               </a:rPr>
               <a:t>Finalized the notebook, generated all figures, wrote the README and project summary, prepared the 7-slide presentation, and submitted all deliverables before the 17:00 deadline.</a:t>
             </a:r>
-            <a:endParaRPr lang="en-US" sz="1400" dirty="0">
-              <a:solidFill>
-                <a:srgbClr val="000000"/>
-              </a:solidFill>
-              <a:latin typeface="Merriweather Sans Light"/>
-              <a:ea typeface="Merriweather Sans Light"/>
-              <a:cs typeface="Merriweather Sans Light"/>
-              <a:sym typeface="Merriweather Sans Light"/>
-            </a:endParaRPr>
           </a:p>
         </p:txBody>
       </p:sp>
@@ -16198,6 +16379,13 @@
     <a:masterClrMapping/>
   </p:clrMapOvr>
   <p:transition spd="med"/>
+  <p:timing>
+    <p:tnLst>
+      <p:par>
+        <p:cTn id="1" dur="indefinite" restart="never" nodeType="tmRoot"/>
+      </p:par>
+    </p:tnLst>
+  </p:timing>
 </p:sld>
 </file>
 
@@ -16270,23 +16458,37 @@
               </a:defRPr>
             </a:pPr>
             <a:r>
-              <a:rPr lang="en-US" sz="1300" dirty="0">
-                <a:solidFill>
-                  <a:srgbClr val="000000"/>
+              <a:rPr lang="en-US" sz="1300" b="1" dirty="0">
+                <a:solidFill>
+                  <a:schemeClr val="bg1">
+                    <a:lumMod val="50000"/>
+                  </a:schemeClr>
                 </a:solidFill>
                 <a:latin typeface="Merriweather Sans Light"/>
                 <a:ea typeface="Merriweather Sans Light"/>
                 <a:cs typeface="Merriweather Sans Light"/>
               </a:rPr>
-              <a:t>Day 1 — Problem Definition &amp; Data Selection: Framed the research question on rainfall variability and Syrian wheat production; identified three credible datasets (NASA POWER, HDX, FAOSTAT); submitted the Problem Statement by 29 Sep 21:00.</a:t>
-            </a:r>
-          </a:p>
-          <a:p>
-            <a:pPr marL="0" indent="0">
+              <a:t>Day 1 — Problem Definition &amp; Data </a:t>
+            </a:r>
+            <a:r>
+              <a:rPr lang="en-US" sz="1300" b="1" dirty="0" smtClean="0">
+                <a:solidFill>
+                  <a:schemeClr val="bg1">
+                    <a:lumMod val="50000"/>
+                  </a:schemeClr>
+                </a:solidFill>
+                <a:latin typeface="Merriweather Sans Light"/>
+                <a:ea typeface="Merriweather Sans Light"/>
+                <a:cs typeface="Merriweather Sans Light"/>
+              </a:rPr>
+              <a:t>Selection</a:t>
+            </a:r>
+          </a:p>
+          <a:p>
+            <a:pPr lvl="1">
               <a:lnSpc>
                 <a:spcPct val="100000"/>
               </a:lnSpc>
-              <a:buNone/>
               <a:defRPr sz="1400">
                 <a:solidFill>
                   <a:srgbClr val="000000"/>
@@ -16297,6 +16499,39 @@
                 <a:sym typeface="Merriweather Sans Light"/>
               </a:defRPr>
             </a:pPr>
+            <a:r>
+              <a:rPr lang="en-US" sz="1300" dirty="0" smtClean="0">
+                <a:solidFill>
+                  <a:srgbClr val="000000"/>
+                </a:solidFill>
+                <a:latin typeface="Merriweather Sans Light"/>
+                <a:ea typeface="Merriweather Sans Light"/>
+                <a:cs typeface="Merriweather Sans Light"/>
+              </a:rPr>
+              <a:t>Framed </a:t>
+            </a:r>
+            <a:r>
+              <a:rPr lang="en-US" sz="1300" dirty="0">
+                <a:solidFill>
+                  <a:srgbClr val="000000"/>
+                </a:solidFill>
+                <a:latin typeface="Merriweather Sans Light"/>
+                <a:ea typeface="Merriweather Sans Light"/>
+                <a:cs typeface="Merriweather Sans Light"/>
+              </a:rPr>
+              <a:t>the research question on rainfall variability and Syrian wheat production; identified three credible datasets (NASA POWER, HDX, FAOSTAT); submitted the Problem Statement by 29 Sep 21:00</a:t>
+            </a:r>
+            <a:r>
+              <a:rPr lang="en-US" sz="1300" dirty="0" smtClean="0">
+                <a:solidFill>
+                  <a:srgbClr val="000000"/>
+                </a:solidFill>
+                <a:latin typeface="Merriweather Sans Light"/>
+                <a:ea typeface="Merriweather Sans Light"/>
+                <a:cs typeface="Merriweather Sans Light"/>
+              </a:rPr>
+              <a:t>.</a:t>
+            </a:r>
             <a:endParaRPr lang="en-US" sz="1300" dirty="0">
               <a:solidFill>
                 <a:srgbClr val="000000"/>
@@ -16322,45 +16557,37 @@
               </a:defRPr>
             </a:pPr>
             <a:r>
-              <a:rPr lang="en-US" sz="1300" dirty="0">
-                <a:solidFill>
-                  <a:srgbClr val="000000"/>
+              <a:rPr lang="en-US" sz="1300" b="1" dirty="0">
+                <a:solidFill>
+                  <a:schemeClr val="bg1">
+                    <a:lumMod val="50000"/>
+                  </a:schemeClr>
                 </a:solidFill>
                 <a:latin typeface="Merriweather Sans Light"/>
                 <a:ea typeface="Merriweather Sans Light"/>
                 <a:cs typeface="Merriweather Sans Light"/>
               </a:rPr>
-              <a:t>Day 2 — Data Pipeline Construction: Fetched daily solar data for five Syrian regions via the NASA POWER API; aggregated </a:t>
-            </a:r>
-            <a:r>
-              <a:rPr lang="en-US" sz="1300" dirty="0" err="1">
-                <a:solidFill>
-                  <a:srgbClr val="000000"/>
+              <a:t>Day 2 — Data Pipeline </a:t>
+            </a:r>
+            <a:r>
+              <a:rPr lang="en-US" sz="1300" b="1" dirty="0">
+                <a:solidFill>
+                  <a:schemeClr val="bg1">
+                    <a:lumMod val="50000"/>
+                  </a:schemeClr>
                 </a:solidFill>
                 <a:latin typeface="Merriweather Sans Light"/>
                 <a:ea typeface="Merriweather Sans Light"/>
                 <a:cs typeface="Merriweather Sans Light"/>
               </a:rPr>
-              <a:t>dekadal</a:t>
-            </a:r>
-            <a:r>
-              <a:rPr lang="en-US" sz="1300" dirty="0">
-                <a:solidFill>
-                  <a:srgbClr val="000000"/>
-                </a:solidFill>
-                <a:latin typeface="Merriweather Sans Light"/>
-                <a:ea typeface="Merriweather Sans Light"/>
-                <a:cs typeface="Merriweather Sans Light"/>
-              </a:rPr>
-              <a:t> HDX rainfall into growing-season totals (Nov–May) with correct year-shift logic; pivoted FAOSTAT production data from long to wide format; inner-joined all three sources into a 34-year panel (1991–2024).</a:t>
-            </a:r>
-          </a:p>
-          <a:p>
-            <a:pPr marL="0" indent="0">
+              <a:t>Construction</a:t>
+            </a:r>
+          </a:p>
+          <a:p>
+            <a:pPr lvl="1">
               <a:lnSpc>
                 <a:spcPct val="100000"/>
               </a:lnSpc>
-              <a:buNone/>
               <a:defRPr sz="1400">
                 <a:solidFill>
                   <a:srgbClr val="000000"/>
@@ -16371,6 +16598,61 @@
                 <a:sym typeface="Merriweather Sans Light"/>
               </a:defRPr>
             </a:pPr>
+            <a:r>
+              <a:rPr lang="en-US" sz="1300" dirty="0" smtClean="0">
+                <a:solidFill>
+                  <a:srgbClr val="000000"/>
+                </a:solidFill>
+                <a:latin typeface="Merriweather Sans Light"/>
+                <a:ea typeface="Merriweather Sans Light"/>
+                <a:cs typeface="Merriweather Sans Light"/>
+              </a:rPr>
+              <a:t>Fetched </a:t>
+            </a:r>
+            <a:r>
+              <a:rPr lang="en-US" sz="1300" dirty="0">
+                <a:solidFill>
+                  <a:srgbClr val="000000"/>
+                </a:solidFill>
+                <a:latin typeface="Merriweather Sans Light"/>
+                <a:ea typeface="Merriweather Sans Light"/>
+                <a:cs typeface="Merriweather Sans Light"/>
+              </a:rPr>
+              <a:t>daily solar data for five Syrian regions via the NASA POWER API; aggregated </a:t>
+            </a:r>
+            <a:r>
+              <a:rPr lang="en-US" sz="1300" dirty="0" err="1">
+                <a:solidFill>
+                  <a:srgbClr val="000000"/>
+                </a:solidFill>
+                <a:latin typeface="Merriweather Sans Light"/>
+                <a:ea typeface="Merriweather Sans Light"/>
+                <a:cs typeface="Merriweather Sans Light"/>
+              </a:rPr>
+              <a:t>dekadal</a:t>
+            </a:r>
+            <a:r>
+              <a:rPr lang="en-US" sz="1300" dirty="0">
+                <a:solidFill>
+                  <a:srgbClr val="000000"/>
+                </a:solidFill>
+                <a:latin typeface="Merriweather Sans Light"/>
+                <a:ea typeface="Merriweather Sans Light"/>
+                <a:cs typeface="Merriweather Sans Light"/>
+              </a:rPr>
+              <a:t> HDX rainfall into growing-season totals (Nov–May) with correct year-shift logic; pivoted FAOSTAT production data from long to wide format; inner-joined all three sources into a 34-year panel (1991–2024</a:t>
+            </a:r>
+            <a:r>
+              <a:rPr lang="en-US" sz="1300" dirty="0" smtClean="0">
+                <a:solidFill>
+                  <a:srgbClr val="000000"/>
+                </a:solidFill>
+                <a:latin typeface="Merriweather Sans Light"/>
+                <a:ea typeface="Merriweather Sans Light"/>
+                <a:cs typeface="Merriweather Sans Light"/>
+              </a:rPr>
+              <a:t>).</a:t>
+            </a:r>
             <a:endParaRPr lang="en-US" sz="1300" dirty="0">
               <a:solidFill>
                 <a:srgbClr val="000000"/>
@@ -16381,7 +16663,7 @@
             </a:endParaRPr>
           </a:p>
           <a:p>
-            <a:pPr>
+            <a:pPr lvl="1">
               <a:lnSpc>
                 <a:spcPct val="100000"/>
               </a:lnSpc>
@@ -16404,27 +16686,8 @@
                 <a:ea typeface="Merriweather Sans Light"/>
                 <a:cs typeface="Merriweather Sans Light"/>
               </a:rPr>
-              <a:t>Data-Quality Correction: Detected that NASA returns solar in MJ/m²/day rather than kWh/m²/day; corrected by dividing by 3.6 after observing physically impossible values (&gt;12 kWh/m²/day) in the raw distribution</a:t>
-            </a:r>
-            <a:r>
-              <a:rPr lang="en-US" sz="1300" dirty="0">
-                <a:solidFill>
-                  <a:srgbClr val="000000"/>
-                </a:solidFill>
-                <a:latin typeface="Merriweather Sans Light"/>
-                <a:ea typeface="Merriweather Sans Light"/>
-                <a:cs typeface="Merriweather Sans Light"/>
-              </a:rPr>
-              <a:t>.</a:t>
-            </a:r>
-            <a:endParaRPr lang="en-US" sz="1300" dirty="0">
-              <a:solidFill>
-                <a:srgbClr val="000000"/>
-              </a:solidFill>
-              <a:latin typeface="Merriweather Sans Light"/>
-              <a:ea typeface="Merriweather Sans Light"/>
-              <a:cs typeface="Merriweather Sans Light"/>
-            </a:endParaRPr>
+              <a:t>Data-Quality Correction: Detected that NASA returns solar in MJ/m²/day rather than kWh/m²/day; corrected by dividing by 3.6 after observing physically impossible values (&gt;12 kWh/m²/day) in the raw distribution.</a:t>
+            </a:r>
           </a:p>
         </p:txBody>
       </p:sp>
@@ -16868,8 +17131,8 @@
         </p:nvSpPr>
         <p:spPr>
           <a:xfrm>
-            <a:off x="6306767" y="1663975"/>
-            <a:ext cx="5524390" cy="4301717"/>
+            <a:off x="6306767" y="2145447"/>
+            <a:ext cx="5524390" cy="3731929"/>
           </a:xfrm>
           <a:prstGeom prst="rect">
             <a:avLst/>
@@ -16879,7 +17142,7 @@
           </a:ln>
           <a:extLst>
             <a:ext uri="{C572A759-6A51-4108-AA02-DFA0A04FC94B}">
-              <ma14:wrappingTextBoxFlag xmlns="" xmlns:m="http://schemas.openxmlformats.org/officeDocument/2006/math" xmlns:a14="http://schemas.microsoft.com/office/drawing/2010/main" xmlns:ma14="http://schemas.microsoft.com/office/mac/drawingml/2011/main" val="1"/>
+              <ma14:wrappingTextBoxFlag xmlns:ma14="http://schemas.microsoft.com/office/mac/drawingml/2011/main" xmlns:a14="http://schemas.microsoft.com/office/drawing/2010/main" xmlns:m="http://schemas.openxmlformats.org/officeDocument/2006/math" xmlns="" val="1"/>
             </a:ext>
           </a:extLst>
         </p:spPr>
@@ -17166,25 +17429,39 @@
               </a:defRPr>
             </a:pPr>
             <a:r>
-              <a:rPr lang="en-US" sz="1300" dirty="0">
-                <a:solidFill>
-                  <a:srgbClr val="000000"/>
+              <a:rPr lang="en-US" sz="1300" b="1" dirty="0">
+                <a:solidFill>
+                  <a:schemeClr val="bg1">
+                    <a:lumMod val="50000"/>
+                  </a:schemeClr>
                 </a:solidFill>
                 <a:latin typeface="Merriweather Sans Light"/>
                 <a:ea typeface="Merriweather Sans Light"/>
                 <a:cs typeface="Merriweather Sans Light"/>
                 <a:sym typeface="Merriweather Sans Light"/>
               </a:rPr>
-              <a:t>Day 3 — Analysis &amp; Modelling: Ran correlation analysis across all five variables; trained a linear regression predicting yield from rainfall and solar (R² ≈ 0.35 cross-validated); diagnosed area model (R² = 0.017) as evidence that planted area is not climate-driven.</a:t>
-            </a:r>
-          </a:p>
-          <a:p>
-            <a:pPr marL="0" indent="0" hangingPunct="1">
+              <a:t>Day 3 — Analysis &amp; </a:t>
+            </a:r>
+            <a:r>
+              <a:rPr lang="en-US" sz="1300" b="1" dirty="0">
+                <a:solidFill>
+                  <a:schemeClr val="bg1">
+                    <a:lumMod val="50000"/>
+                  </a:schemeClr>
+                </a:solidFill>
+                <a:latin typeface="Merriweather Sans Light"/>
+                <a:ea typeface="Merriweather Sans Light"/>
+                <a:cs typeface="Merriweather Sans Light"/>
+                <a:sym typeface="Merriweather Sans Light"/>
+              </a:rPr>
+              <a:t>Modelling</a:t>
+            </a:r>
+          </a:p>
+          <a:p>
+            <a:pPr lvl="1" hangingPunct="1">
               <a:lnSpc>
                 <a:spcPct val="100000"/>
               </a:lnSpc>
-              <a:buFont typeface="Arial"/>
-              <a:buNone/>
               <a:defRPr sz="1400">
                 <a:solidFill>
                   <a:srgbClr val="000000"/>
@@ -17195,6 +17472,42 @@
                 <a:sym typeface="Merriweather Sans Light"/>
               </a:defRPr>
             </a:pPr>
+            <a:r>
+              <a:rPr lang="en-US" sz="1300" dirty="0" smtClean="0">
+                <a:solidFill>
+                  <a:srgbClr val="000000"/>
+                </a:solidFill>
+                <a:latin typeface="Merriweather Sans Light"/>
+                <a:ea typeface="Merriweather Sans Light"/>
+                <a:cs typeface="Merriweather Sans Light"/>
+                <a:sym typeface="Merriweather Sans Light"/>
+              </a:rPr>
+              <a:t>Ran </a:t>
+            </a:r>
+            <a:r>
+              <a:rPr lang="en-US" sz="1300" dirty="0">
+                <a:solidFill>
+                  <a:srgbClr val="000000"/>
+                </a:solidFill>
+                <a:latin typeface="Merriweather Sans Light"/>
+                <a:ea typeface="Merriweather Sans Light"/>
+                <a:cs typeface="Merriweather Sans Light"/>
+                <a:sym typeface="Merriweather Sans Light"/>
+              </a:rPr>
+              <a:t>correlation analysis across all five variables; trained a linear regression predicting yield from rainfall and solar (R² ≈ 0.35 cross-validated); diagnosed area model (R² = 0.017) as evidence that planted area is not climate-driven</a:t>
+            </a:r>
+            <a:r>
+              <a:rPr lang="en-US" sz="1300" dirty="0" smtClean="0">
+                <a:solidFill>
+                  <a:srgbClr val="000000"/>
+                </a:solidFill>
+                <a:latin typeface="Merriweather Sans Light"/>
+                <a:ea typeface="Merriweather Sans Light"/>
+                <a:cs typeface="Merriweather Sans Light"/>
+                <a:sym typeface="Merriweather Sans Light"/>
+              </a:rPr>
+              <a:t>.</a:t>
+            </a:r>
             <a:endParaRPr lang="en-US" sz="1300" dirty="0">
               <a:solidFill>
                 <a:srgbClr val="000000"/>
@@ -17221,9 +17534,11 @@
               </a:defRPr>
             </a:pPr>
             <a:r>
-              <a:rPr lang="en-US" sz="1300" dirty="0">
-                <a:solidFill>
-                  <a:srgbClr val="000000"/>
+              <a:rPr lang="en-US" sz="1300" b="1" dirty="0">
+                <a:solidFill>
+                  <a:schemeClr val="bg1">
+                    <a:lumMod val="50000"/>
+                  </a:schemeClr>
                 </a:solidFill>
                 <a:latin typeface="Merriweather Sans Light"/>
                 <a:ea typeface="Merriweather Sans Light"/>
@@ -17233,9 +17548,11 @@
               <a:t>Day 3 — Deployment: Packaged the model with </a:t>
             </a:r>
             <a:r>
-              <a:rPr lang="en-US" sz="1300" dirty="0" err="1">
-                <a:solidFill>
-                  <a:srgbClr val="000000"/>
+              <a:rPr lang="en-US" sz="1300" b="1" dirty="0" err="1">
+                <a:solidFill>
+                  <a:schemeClr val="bg1">
+                    <a:lumMod val="50000"/>
+                  </a:schemeClr>
                 </a:solidFill>
                 <a:latin typeface="Merriweather Sans Light"/>
                 <a:ea typeface="Merriweather Sans Light"/>
@@ -17244,8 +17561,35 @@
               </a:rPr>
               <a:t>joblib</a:t>
             </a:r>
-            <a:r>
-              <a:rPr lang="en-US" sz="1300" dirty="0">
+            <a:endParaRPr lang="en-US" sz="1300" b="1" dirty="0">
+              <a:solidFill>
+                <a:schemeClr val="bg1">
+                  <a:lumMod val="50000"/>
+                </a:schemeClr>
+              </a:solidFill>
+              <a:latin typeface="Merriweather Sans Light"/>
+              <a:ea typeface="Merriweather Sans Light"/>
+              <a:cs typeface="Merriweather Sans Light"/>
+              <a:sym typeface="Merriweather Sans Light"/>
+            </a:endParaRPr>
+          </a:p>
+          <a:p>
+            <a:pPr lvl="1" hangingPunct="1">
+              <a:lnSpc>
+                <a:spcPct val="100000"/>
+              </a:lnSpc>
+              <a:defRPr sz="1400">
+                <a:solidFill>
+                  <a:srgbClr val="000000"/>
+                </a:solidFill>
+                <a:latin typeface="Merriweather Sans Light"/>
+                <a:ea typeface="Merriweather Sans Light"/>
+                <a:cs typeface="Merriweather Sans Light"/>
+                <a:sym typeface="Merriweather Sans Light"/>
+              </a:defRPr>
+            </a:pPr>
+            <a:r>
+              <a:rPr lang="en-US" sz="1300" dirty="0" smtClean="0">
                 <a:solidFill>
                   <a:srgbClr val="000000"/>
                 </a:solidFill>
@@ -17254,7 +17598,19 @@
                 <a:cs typeface="Merriweather Sans Light"/>
                 <a:sym typeface="Merriweather Sans Light"/>
               </a:rPr>
-              <a:t>; built a </a:t>
+              <a:t>built </a:t>
+            </a:r>
+            <a:r>
+              <a:rPr lang="en-US" sz="1300" dirty="0">
+                <a:solidFill>
+                  <a:srgbClr val="000000"/>
+                </a:solidFill>
+                <a:latin typeface="Merriweather Sans Light"/>
+                <a:ea typeface="Merriweather Sans Light"/>
+                <a:cs typeface="Merriweather Sans Light"/>
+                <a:sym typeface="Merriweather Sans Light"/>
+              </a:rPr>
+              <a:t>a </a:t>
             </a:r>
             <a:r>
               <a:rPr lang="en-US" sz="1300" dirty="0" err="1">
@@ -17278,17 +17634,10 @@
                 <a:cs typeface="Merriweather Sans Light"/>
                 <a:sym typeface="Merriweather Sans Light"/>
               </a:rPr>
-              <a:t> service with both a browser form and a JSON API endpoint; deployed to Render; resolved a python-multipart dependency error during deployment.</a:t>
-            </a:r>
-          </a:p>
-          <a:p>
-            <a:pPr marL="0" indent="0" hangingPunct="1">
-              <a:lnSpc>
-                <a:spcPct val="100000"/>
-              </a:lnSpc>
-              <a:buFont typeface="Arial"/>
-              <a:buNone/>
-              <a:defRPr sz="1400">
+              <a:t> service with both a browser form and a JSON API endpoint; deployed to Render; resolved a python-multipart dependency error during deployment</a:t>
+            </a:r>
+            <a:r>
+              <a:rPr lang="en-US" sz="1300" dirty="0" smtClean="0">
                 <a:solidFill>
                   <a:srgbClr val="000000"/>
                 </a:solidFill>
@@ -17296,8 +17645,9 @@
                 <a:ea typeface="Merriweather Sans Light"/>
                 <a:cs typeface="Merriweather Sans Light"/>
                 <a:sym typeface="Merriweather Sans Light"/>
-              </a:defRPr>
-            </a:pPr>
+              </a:rPr>
+              <a:t>.</a:t>
+            </a:r>
             <a:endParaRPr lang="en-US" sz="1300" dirty="0">
               <a:solidFill>
                 <a:srgbClr val="000000"/>
@@ -17324,16 +17674,72 @@
               </a:defRPr>
             </a:pPr>
             <a:r>
-              <a:rPr lang="en-US" sz="1300" dirty="0">
-                <a:solidFill>
-                  <a:srgbClr val="000000"/>
+              <a:rPr lang="en-US" sz="1300" b="1" dirty="0">
+                <a:solidFill>
+                  <a:schemeClr val="bg1">
+                    <a:lumMod val="50000"/>
+                  </a:schemeClr>
                 </a:solidFill>
                 <a:latin typeface="Merriweather Sans Light"/>
                 <a:ea typeface="Merriweather Sans Light"/>
                 <a:cs typeface="Merriweather Sans Light"/>
                 <a:sym typeface="Merriweather Sans Light"/>
               </a:rPr>
-              <a:t>Day 3 — Power BI Dashboard: Built an interactive dashboard with KPI cards (rainfall anomaly, production, elasticity), a dual-axis rainfall-vs-production time series, a regional drought-severity </a:t>
+              <a:t>Day 3 — Power BI </a:t>
+            </a:r>
+            <a:r>
+              <a:rPr lang="en-US" sz="1300" b="1" dirty="0">
+                <a:solidFill>
+                  <a:schemeClr val="bg1">
+                    <a:lumMod val="50000"/>
+                  </a:schemeClr>
+                </a:solidFill>
+                <a:latin typeface="Merriweather Sans Light"/>
+                <a:ea typeface="Merriweather Sans Light"/>
+                <a:cs typeface="Merriweather Sans Light"/>
+                <a:sym typeface="Merriweather Sans Light"/>
+              </a:rPr>
+              <a:t>Dashboard</a:t>
+            </a:r>
+          </a:p>
+          <a:p>
+            <a:pPr lvl="1" hangingPunct="1">
+              <a:lnSpc>
+                <a:spcPct val="100000"/>
+              </a:lnSpc>
+              <a:defRPr sz="1400">
+                <a:solidFill>
+                  <a:srgbClr val="000000"/>
+                </a:solidFill>
+                <a:latin typeface="Merriweather Sans Light"/>
+                <a:ea typeface="Merriweather Sans Light"/>
+                <a:cs typeface="Merriweather Sans Light"/>
+                <a:sym typeface="Merriweather Sans Light"/>
+              </a:defRPr>
+            </a:pPr>
+            <a:r>
+              <a:rPr lang="en-US" sz="1300" dirty="0" smtClean="0">
+                <a:solidFill>
+                  <a:srgbClr val="000000"/>
+                </a:solidFill>
+                <a:latin typeface="Merriweather Sans Light"/>
+                <a:ea typeface="Merriweather Sans Light"/>
+                <a:cs typeface="Merriweather Sans Light"/>
+                <a:sym typeface="Merriweather Sans Light"/>
+              </a:rPr>
+              <a:t>Built </a:t>
+            </a:r>
+            <a:r>
+              <a:rPr lang="en-US" sz="1300" dirty="0">
+                <a:solidFill>
+                  <a:srgbClr val="000000"/>
+                </a:solidFill>
+                <a:latin typeface="Merriweather Sans Light"/>
+                <a:ea typeface="Merriweather Sans Light"/>
+                <a:cs typeface="Merriweather Sans Light"/>
+                <a:sym typeface="Merriweather Sans Light"/>
+              </a:rPr>
+              <a:t>an interactive dashboard with KPI cards (rainfall anomaly, production, elasticity), a dual-axis rainfall-vs-production time series, a regional drought-severity </a:t>
             </a:r>
             <a:r>
               <a:rPr lang="en-US" sz="1300" dirty="0" err="1">
@@ -17357,17 +17763,10 @@
                 <a:cs typeface="Merriweather Sans Light"/>
                 <a:sym typeface="Merriweather Sans Light"/>
               </a:rPr>
-              <a:t>, a rainfall–yield scatter plot, and a year slicer.</a:t>
-            </a:r>
-          </a:p>
-          <a:p>
-            <a:pPr marL="0" indent="0" hangingPunct="1">
-              <a:lnSpc>
-                <a:spcPct val="100000"/>
-              </a:lnSpc>
-              <a:buFont typeface="Arial"/>
-              <a:buNone/>
-              <a:defRPr sz="1400">
+              <a:t>, a rainfall–yield scatter plot, and a year slicer</a:t>
+            </a:r>
+            <a:r>
+              <a:rPr lang="en-US" sz="1300" dirty="0" smtClean="0">
                 <a:solidFill>
                   <a:srgbClr val="000000"/>
                 </a:solidFill>
@@ -17375,8 +17774,9 @@
                 <a:ea typeface="Merriweather Sans Light"/>
                 <a:cs typeface="Merriweather Sans Light"/>
                 <a:sym typeface="Merriweather Sans Light"/>
-              </a:defRPr>
-            </a:pPr>
+              </a:rPr>
+              <a:t>.</a:t>
+            </a:r>
             <a:endParaRPr lang="en-US" sz="1300" dirty="0">
               <a:solidFill>
                 <a:srgbClr val="000000"/>
@@ -17403,25 +17803,674 @@
               </a:defRPr>
             </a:pPr>
             <a:r>
-              <a:rPr lang="en-US" sz="1300" dirty="0">
-                <a:solidFill>
-                  <a:srgbClr val="000000"/>
+              <a:rPr lang="en-US" sz="1300" b="1" dirty="0">
+                <a:solidFill>
+                  <a:schemeClr val="bg1">
+                    <a:lumMod val="50000"/>
+                  </a:schemeClr>
                 </a:solidFill>
                 <a:latin typeface="Merriweather Sans Light"/>
                 <a:ea typeface="Merriweather Sans Light"/>
                 <a:cs typeface="Merriweather Sans Light"/>
                 <a:sym typeface="Merriweather Sans Light"/>
               </a:rPr>
-              <a:t>Day 4 — Finalization: Finalized the notebook, generated publication-quality figures, wrote the README and project summary, prepared the 7-slide presentation, and submitted all deliverables before the 17:00 deadline.</a:t>
-            </a:r>
-            <a:endParaRPr lang="en-US" sz="1300" dirty="0">
+              <a:t>Day 4 — </a:t>
+            </a:r>
+            <a:r>
+              <a:rPr lang="en-US" sz="1300" b="1" dirty="0">
+                <a:solidFill>
+                  <a:schemeClr val="bg1">
+                    <a:lumMod val="50000"/>
+                  </a:schemeClr>
+                </a:solidFill>
+                <a:latin typeface="Merriweather Sans Light"/>
+                <a:ea typeface="Merriweather Sans Light"/>
+                <a:cs typeface="Merriweather Sans Light"/>
+                <a:sym typeface="Merriweather Sans Light"/>
+              </a:rPr>
+              <a:t>Finalization</a:t>
+            </a:r>
+          </a:p>
+          <a:p>
+            <a:pPr lvl="1" hangingPunct="1">
+              <a:lnSpc>
+                <a:spcPct val="100000"/>
+              </a:lnSpc>
+              <a:defRPr sz="1400">
+                <a:solidFill>
+                  <a:srgbClr val="000000"/>
+                </a:solidFill>
+                <a:latin typeface="Merriweather Sans Light"/>
+                <a:ea typeface="Merriweather Sans Light"/>
+                <a:cs typeface="Merriweather Sans Light"/>
+                <a:sym typeface="Merriweather Sans Light"/>
+              </a:defRPr>
+            </a:pPr>
+            <a:r>
+              <a:rPr lang="en-US" sz="1300" dirty="0" smtClean="0">
+                <a:solidFill>
+                  <a:srgbClr val="000000"/>
+                </a:solidFill>
+                <a:latin typeface="Merriweather Sans Light"/>
+                <a:ea typeface="Merriweather Sans Light"/>
+                <a:cs typeface="Merriweather Sans Light"/>
+                <a:sym typeface="Merriweather Sans Light"/>
+              </a:rPr>
+              <a:t>Finalized </a:t>
+            </a:r>
+            <a:r>
+              <a:rPr lang="en-US" sz="1300" dirty="0">
+                <a:solidFill>
+                  <a:srgbClr val="000000"/>
+                </a:solidFill>
+                <a:latin typeface="Merriweather Sans Light"/>
+                <a:ea typeface="Merriweather Sans Light"/>
+                <a:cs typeface="Merriweather Sans Light"/>
+                <a:sym typeface="Merriweather Sans Light"/>
+              </a:rPr>
+              <a:t>the notebook, generated publication-quality figures, wrote the README and project summary, prepared the 7-slide presentation, and submitted all deliverables before the 17:00 deadline.</a:t>
+            </a:r>
+          </a:p>
+        </p:txBody>
+      </p:sp>
+      <p:cxnSp>
+        <p:nvCxnSpPr>
+          <p:cNvPr id="4" name="Straight Connector 3"/>
+          <p:cNvCxnSpPr/>
+          <p:nvPr/>
+        </p:nvCxnSpPr>
+        <p:spPr>
+          <a:xfrm>
+            <a:off x="493817" y="3013192"/>
+            <a:ext cx="0" cy="3166982"/>
+          </a:xfrm>
+          <a:prstGeom prst="line">
+            <a:avLst/>
+          </a:prstGeom>
+          <a:ln w="76200"/>
+        </p:spPr>
+        <p:style>
+          <a:lnRef idx="1">
+            <a:schemeClr val="accent2"/>
+          </a:lnRef>
+          <a:fillRef idx="0">
+            <a:schemeClr val="accent2"/>
+          </a:fillRef>
+          <a:effectRef idx="0">
+            <a:schemeClr val="accent2"/>
+          </a:effectRef>
+          <a:fontRef idx="minor">
+            <a:schemeClr val="tx1"/>
+          </a:fontRef>
+        </p:style>
+      </p:cxnSp>
+      <p:cxnSp>
+        <p:nvCxnSpPr>
+          <p:cNvPr id="19" name="Straight Connector 18"/>
+          <p:cNvCxnSpPr/>
+          <p:nvPr/>
+        </p:nvCxnSpPr>
+        <p:spPr>
+          <a:xfrm>
+            <a:off x="6306767" y="1904828"/>
+            <a:ext cx="0" cy="4468263"/>
+          </a:xfrm>
+          <a:prstGeom prst="line">
+            <a:avLst/>
+          </a:prstGeom>
+          <a:ln/>
+        </p:spPr>
+        <p:style>
+          <a:lnRef idx="1">
+            <a:schemeClr val="accent2"/>
+          </a:lnRef>
+          <a:fillRef idx="0">
+            <a:schemeClr val="accent2"/>
+          </a:fillRef>
+          <a:effectRef idx="0">
+            <a:schemeClr val="accent2"/>
+          </a:effectRef>
+          <a:fontRef idx="minor">
+            <a:schemeClr val="tx1"/>
+          </a:fontRef>
+        </p:style>
+      </p:cxnSp>
+      <p:cxnSp>
+        <p:nvCxnSpPr>
+          <p:cNvPr id="7" name="Straight Arrow Connector 6"/>
+          <p:cNvCxnSpPr/>
+          <p:nvPr/>
+        </p:nvCxnSpPr>
+        <p:spPr>
+          <a:xfrm>
+            <a:off x="6927273" y="4011411"/>
+            <a:ext cx="914400" cy="914400"/>
+          </a:xfrm>
+          <a:prstGeom prst="straightConnector1">
+            <a:avLst/>
+          </a:prstGeom>
+          <a:noFill/>
+          <a:ln w="12700" cap="flat">
+            <a:solidFill>
+              <a:schemeClr val="accent1"/>
+            </a:solidFill>
+            <a:prstDash val="solid"/>
+            <a:miter lim="800000"/>
+            <a:tailEnd type="triangle"/>
+          </a:ln>
+          <a:effectLst/>
+          <a:sp3d/>
+        </p:spPr>
+        <p:style>
+          <a:lnRef idx="0">
+            <a:scrgbClr r="0" g="0" b="0"/>
+          </a:lnRef>
+          <a:fillRef idx="0">
+            <a:scrgbClr r="0" g="0" b="0"/>
+          </a:fillRef>
+          <a:effectRef idx="0">
+            <a:scrgbClr r="0" g="0" b="0"/>
+          </a:effectRef>
+          <a:fontRef idx="none"/>
+        </p:style>
+      </p:cxnSp>
+      <p:cxnSp>
+        <p:nvCxnSpPr>
+          <p:cNvPr id="9" name="Straight Arrow Connector 8"/>
+          <p:cNvCxnSpPr/>
+          <p:nvPr/>
+        </p:nvCxnSpPr>
+        <p:spPr>
+          <a:xfrm>
+            <a:off x="6306767" y="1870364"/>
+            <a:ext cx="0" cy="4516581"/>
+          </a:xfrm>
+          <a:prstGeom prst="straightConnector1">
+            <a:avLst/>
+          </a:prstGeom>
+          <a:ln w="57150">
+            <a:tailEnd type="triangle"/>
+          </a:ln>
+        </p:spPr>
+        <p:style>
+          <a:lnRef idx="1">
+            <a:schemeClr val="accent2"/>
+          </a:lnRef>
+          <a:fillRef idx="0">
+            <a:schemeClr val="accent2"/>
+          </a:fillRef>
+          <a:effectRef idx="0">
+            <a:schemeClr val="accent2"/>
+          </a:effectRef>
+          <a:fontRef idx="minor">
+            <a:schemeClr val="tx1"/>
+          </a:fontRef>
+        </p:style>
+      </p:cxnSp>
+      <p:sp>
+        <p:nvSpPr>
+          <p:cNvPr id="10" name="Oval 9"/>
+          <p:cNvSpPr/>
+          <p:nvPr/>
+        </p:nvSpPr>
+        <p:spPr>
+          <a:xfrm>
+            <a:off x="399764" y="3078966"/>
+            <a:ext cx="179200" cy="207818"/>
+          </a:xfrm>
+          <a:prstGeom prst="ellipse">
+            <a:avLst/>
+          </a:prstGeom>
+          <a:solidFill>
+            <a:schemeClr val="tx2"/>
+          </a:solidFill>
+          <a:ln w="12700" cap="flat">
+            <a:solidFill>
+              <a:schemeClr val="accent1"/>
+            </a:solidFill>
+            <a:prstDash val="solid"/>
+            <a:miter lim="800000"/>
+          </a:ln>
+          <a:effectLst/>
+          <a:sp3d/>
+        </p:spPr>
+        <p:style>
+          <a:lnRef idx="0">
+            <a:scrgbClr r="0" g="0" b="0"/>
+          </a:lnRef>
+          <a:fillRef idx="0">
+            <a:scrgbClr r="0" g="0" b="0"/>
+          </a:fillRef>
+          <a:effectRef idx="0">
+            <a:scrgbClr r="0" g="0" b="0"/>
+          </a:effectRef>
+          <a:fontRef idx="none"/>
+        </p:style>
+        <p:txBody>
+          <a:bodyPr rot="0" spcFirstLastPara="1" vertOverflow="overflow" horzOverflow="overflow" vert="horz" wrap="square" lIns="45719" tIns="45719" rIns="45719" bIns="45719" numCol="1" spcCol="38100" rtlCol="0" anchor="ctr">
+            <a:spAutoFit/>
+          </a:bodyPr>
+          <a:lstStyle/>
+          <a:p>
+            <a:pPr marL="0" marR="0" indent="0" algn="l" defTabSz="914400" rtl="0" fontAlgn="auto" latinLnBrk="0" hangingPunct="0">
+              <a:lnSpc>
+                <a:spcPct val="100000"/>
+              </a:lnSpc>
+              <a:spcBef>
+                <a:spcPts val="0"/>
+              </a:spcBef>
+              <a:spcAft>
+                <a:spcPts val="0"/>
+              </a:spcAft>
+              <a:buClrTx/>
+              <a:buSzTx/>
+              <a:buFontTx/>
+              <a:buNone/>
+              <a:tabLst/>
+            </a:pPr>
+            <a:endParaRPr kumimoji="0" lang="en-US" sz="1800" b="0" i="0" u="none" strike="noStrike" cap="none" spc="0" normalizeH="0" baseline="0">
+              <a:ln>
+                <a:noFill/>
+              </a:ln>
               <a:solidFill>
-                <a:srgbClr val="000000"/>
+                <a:srgbClr val="FEFFFE"/>
               </a:solidFill>
-              <a:latin typeface="Merriweather Sans Light"/>
-              <a:ea typeface="Merriweather Sans Light"/>
-              <a:cs typeface="Merriweather Sans Light"/>
-              <a:sym typeface="Merriweather Sans Light"/>
+              <a:effectLst/>
+              <a:uFillTx/>
+              <a:latin typeface="+mj-lt"/>
+              <a:ea typeface="+mj-ea"/>
+              <a:cs typeface="+mj-cs"/>
+              <a:sym typeface="Calibri"/>
+            </a:endParaRPr>
+          </a:p>
+        </p:txBody>
+      </p:sp>
+      <p:sp>
+        <p:nvSpPr>
+          <p:cNvPr id="24" name="Oval 23"/>
+          <p:cNvSpPr/>
+          <p:nvPr/>
+        </p:nvSpPr>
+        <p:spPr>
+          <a:xfrm>
+            <a:off x="372053" y="4349128"/>
+            <a:ext cx="179200" cy="207818"/>
+          </a:xfrm>
+          <a:prstGeom prst="ellipse">
+            <a:avLst/>
+          </a:prstGeom>
+          <a:solidFill>
+            <a:schemeClr val="tx2"/>
+          </a:solidFill>
+          <a:ln w="12700" cap="flat">
+            <a:solidFill>
+              <a:schemeClr val="accent1"/>
+            </a:solidFill>
+            <a:prstDash val="solid"/>
+            <a:miter lim="800000"/>
+          </a:ln>
+          <a:effectLst/>
+          <a:sp3d/>
+        </p:spPr>
+        <p:style>
+          <a:lnRef idx="0">
+            <a:scrgbClr r="0" g="0" b="0"/>
+          </a:lnRef>
+          <a:fillRef idx="0">
+            <a:scrgbClr r="0" g="0" b="0"/>
+          </a:fillRef>
+          <a:effectRef idx="0">
+            <a:scrgbClr r="0" g="0" b="0"/>
+          </a:effectRef>
+          <a:fontRef idx="none"/>
+        </p:style>
+        <p:txBody>
+          <a:bodyPr rot="0" spcFirstLastPara="1" vertOverflow="overflow" horzOverflow="overflow" vert="horz" wrap="square" lIns="45719" tIns="45719" rIns="45719" bIns="45719" numCol="1" spcCol="38100" rtlCol="0" anchor="ctr">
+            <a:spAutoFit/>
+          </a:bodyPr>
+          <a:lstStyle/>
+          <a:p>
+            <a:pPr marL="0" marR="0" indent="0" algn="l" defTabSz="914400" rtl="0" fontAlgn="auto" latinLnBrk="0" hangingPunct="0">
+              <a:lnSpc>
+                <a:spcPct val="100000"/>
+              </a:lnSpc>
+              <a:spcBef>
+                <a:spcPts val="0"/>
+              </a:spcBef>
+              <a:spcAft>
+                <a:spcPts val="0"/>
+              </a:spcAft>
+              <a:buClrTx/>
+              <a:buSzTx/>
+              <a:buFontTx/>
+              <a:buNone/>
+              <a:tabLst/>
+            </a:pPr>
+            <a:endParaRPr kumimoji="0" lang="en-US" sz="1800" b="0" i="0" u="none" strike="noStrike" cap="none" spc="0" normalizeH="0" baseline="0">
+              <a:ln>
+                <a:noFill/>
+              </a:ln>
+              <a:solidFill>
+                <a:srgbClr val="FEFFFE"/>
+              </a:solidFill>
+              <a:effectLst/>
+              <a:uFillTx/>
+              <a:latin typeface="+mj-lt"/>
+              <a:ea typeface="+mj-ea"/>
+              <a:cs typeface="+mj-cs"/>
+              <a:sym typeface="Calibri"/>
+            </a:endParaRPr>
+          </a:p>
+        </p:txBody>
+      </p:sp>
+      <p:sp>
+        <p:nvSpPr>
+          <p:cNvPr id="25" name="Oval 24"/>
+          <p:cNvSpPr/>
+          <p:nvPr/>
+        </p:nvSpPr>
+        <p:spPr>
+          <a:xfrm>
+            <a:off x="6217167" y="1856931"/>
+            <a:ext cx="179200" cy="207818"/>
+          </a:xfrm>
+          <a:prstGeom prst="ellipse">
+            <a:avLst/>
+          </a:prstGeom>
+          <a:solidFill>
+            <a:schemeClr val="tx2"/>
+          </a:solidFill>
+          <a:ln w="12700" cap="flat">
+            <a:solidFill>
+              <a:schemeClr val="accent1"/>
+            </a:solidFill>
+            <a:prstDash val="solid"/>
+            <a:miter lim="800000"/>
+          </a:ln>
+          <a:effectLst/>
+          <a:sp3d/>
+        </p:spPr>
+        <p:style>
+          <a:lnRef idx="0">
+            <a:scrgbClr r="0" g="0" b="0"/>
+          </a:lnRef>
+          <a:fillRef idx="0">
+            <a:scrgbClr r="0" g="0" b="0"/>
+          </a:fillRef>
+          <a:effectRef idx="0">
+            <a:scrgbClr r="0" g="0" b="0"/>
+          </a:effectRef>
+          <a:fontRef idx="none"/>
+        </p:style>
+        <p:txBody>
+          <a:bodyPr rot="0" spcFirstLastPara="1" vertOverflow="overflow" horzOverflow="overflow" vert="horz" wrap="square" lIns="45719" tIns="45719" rIns="45719" bIns="45719" numCol="1" spcCol="38100" rtlCol="0" anchor="ctr">
+            <a:spAutoFit/>
+          </a:bodyPr>
+          <a:lstStyle/>
+          <a:p>
+            <a:pPr marL="0" marR="0" indent="0" algn="l" defTabSz="914400" rtl="0" fontAlgn="auto" latinLnBrk="0" hangingPunct="0">
+              <a:lnSpc>
+                <a:spcPct val="100000"/>
+              </a:lnSpc>
+              <a:spcBef>
+                <a:spcPts val="0"/>
+              </a:spcBef>
+              <a:spcAft>
+                <a:spcPts val="0"/>
+              </a:spcAft>
+              <a:buClrTx/>
+              <a:buSzTx/>
+              <a:buFontTx/>
+              <a:buNone/>
+              <a:tabLst/>
+            </a:pPr>
+            <a:endParaRPr kumimoji="0" lang="en-US" sz="1800" b="0" i="0" u="none" strike="noStrike" cap="none" spc="0" normalizeH="0" baseline="0">
+              <a:ln>
+                <a:noFill/>
+              </a:ln>
+              <a:solidFill>
+                <a:srgbClr val="FEFFFE"/>
+              </a:solidFill>
+              <a:effectLst/>
+              <a:uFillTx/>
+              <a:latin typeface="+mj-lt"/>
+              <a:ea typeface="+mj-ea"/>
+              <a:cs typeface="+mj-cs"/>
+              <a:sym typeface="Calibri"/>
+            </a:endParaRPr>
+          </a:p>
+        </p:txBody>
+      </p:sp>
+      <p:sp>
+        <p:nvSpPr>
+          <p:cNvPr id="26" name="Oval 25"/>
+          <p:cNvSpPr/>
+          <p:nvPr/>
+        </p:nvSpPr>
+        <p:spPr>
+          <a:xfrm>
+            <a:off x="6206857" y="3135878"/>
+            <a:ext cx="179200" cy="207818"/>
+          </a:xfrm>
+          <a:prstGeom prst="ellipse">
+            <a:avLst/>
+          </a:prstGeom>
+          <a:solidFill>
+            <a:schemeClr val="tx2"/>
+          </a:solidFill>
+          <a:ln w="12700" cap="flat">
+            <a:solidFill>
+              <a:schemeClr val="accent1"/>
+            </a:solidFill>
+            <a:prstDash val="solid"/>
+            <a:miter lim="800000"/>
+          </a:ln>
+          <a:effectLst/>
+          <a:sp3d/>
+        </p:spPr>
+        <p:style>
+          <a:lnRef idx="0">
+            <a:scrgbClr r="0" g="0" b="0"/>
+          </a:lnRef>
+          <a:fillRef idx="0">
+            <a:scrgbClr r="0" g="0" b="0"/>
+          </a:fillRef>
+          <a:effectRef idx="0">
+            <a:scrgbClr r="0" g="0" b="0"/>
+          </a:effectRef>
+          <a:fontRef idx="none"/>
+        </p:style>
+        <p:txBody>
+          <a:bodyPr rot="0" spcFirstLastPara="1" vertOverflow="overflow" horzOverflow="overflow" vert="horz" wrap="square" lIns="45719" tIns="45719" rIns="45719" bIns="45719" numCol="1" spcCol="38100" rtlCol="0" anchor="ctr">
+            <a:spAutoFit/>
+          </a:bodyPr>
+          <a:lstStyle/>
+          <a:p>
+            <a:pPr marL="0" marR="0" indent="0" algn="l" defTabSz="914400" rtl="0" fontAlgn="auto" latinLnBrk="0" hangingPunct="0">
+              <a:lnSpc>
+                <a:spcPct val="100000"/>
+              </a:lnSpc>
+              <a:spcBef>
+                <a:spcPts val="0"/>
+              </a:spcBef>
+              <a:spcAft>
+                <a:spcPts val="0"/>
+              </a:spcAft>
+              <a:buClrTx/>
+              <a:buSzTx/>
+              <a:buFontTx/>
+              <a:buNone/>
+              <a:tabLst/>
+            </a:pPr>
+            <a:endParaRPr kumimoji="0" lang="en-US" sz="1800" b="0" i="0" u="none" strike="noStrike" cap="none" spc="0" normalizeH="0" baseline="0">
+              <a:ln>
+                <a:noFill/>
+              </a:ln>
+              <a:solidFill>
+                <a:srgbClr val="FEFFFE"/>
+              </a:solidFill>
+              <a:effectLst/>
+              <a:uFillTx/>
+              <a:latin typeface="+mj-lt"/>
+              <a:ea typeface="+mj-ea"/>
+              <a:cs typeface="+mj-cs"/>
+              <a:sym typeface="Calibri"/>
+            </a:endParaRPr>
+          </a:p>
+        </p:txBody>
+      </p:sp>
+      <p:sp>
+        <p:nvSpPr>
+          <p:cNvPr id="27" name="Oval 26"/>
+          <p:cNvSpPr/>
+          <p:nvPr/>
+        </p:nvSpPr>
+        <p:spPr>
+          <a:xfrm>
+            <a:off x="6206857" y="4133405"/>
+            <a:ext cx="179200" cy="207818"/>
+          </a:xfrm>
+          <a:prstGeom prst="ellipse">
+            <a:avLst/>
+          </a:prstGeom>
+          <a:solidFill>
+            <a:schemeClr val="tx2"/>
+          </a:solidFill>
+          <a:ln w="12700" cap="flat">
+            <a:solidFill>
+              <a:schemeClr val="accent1"/>
+            </a:solidFill>
+            <a:prstDash val="solid"/>
+            <a:miter lim="800000"/>
+          </a:ln>
+          <a:effectLst/>
+          <a:sp3d/>
+        </p:spPr>
+        <p:style>
+          <a:lnRef idx="0">
+            <a:scrgbClr r="0" g="0" b="0"/>
+          </a:lnRef>
+          <a:fillRef idx="0">
+            <a:scrgbClr r="0" g="0" b="0"/>
+          </a:fillRef>
+          <a:effectRef idx="0">
+            <a:scrgbClr r="0" g="0" b="0"/>
+          </a:effectRef>
+          <a:fontRef idx="none"/>
+        </p:style>
+        <p:txBody>
+          <a:bodyPr rot="0" spcFirstLastPara="1" vertOverflow="overflow" horzOverflow="overflow" vert="horz" wrap="square" lIns="45719" tIns="45719" rIns="45719" bIns="45719" numCol="1" spcCol="38100" rtlCol="0" anchor="ctr">
+            <a:spAutoFit/>
+          </a:bodyPr>
+          <a:lstStyle/>
+          <a:p>
+            <a:pPr marL="0" marR="0" indent="0" algn="l" defTabSz="914400" rtl="0" fontAlgn="auto" latinLnBrk="0" hangingPunct="0">
+              <a:lnSpc>
+                <a:spcPct val="100000"/>
+              </a:lnSpc>
+              <a:spcBef>
+                <a:spcPts val="0"/>
+              </a:spcBef>
+              <a:spcAft>
+                <a:spcPts val="0"/>
+              </a:spcAft>
+              <a:buClrTx/>
+              <a:buSzTx/>
+              <a:buFontTx/>
+              <a:buNone/>
+              <a:tabLst/>
+            </a:pPr>
+            <a:endParaRPr kumimoji="0" lang="en-US" sz="1800" b="0" i="0" u="none" strike="noStrike" cap="none" spc="0" normalizeH="0" baseline="0">
+              <a:ln>
+                <a:noFill/>
+              </a:ln>
+              <a:solidFill>
+                <a:srgbClr val="FEFFFE"/>
+              </a:solidFill>
+              <a:effectLst/>
+              <a:uFillTx/>
+              <a:latin typeface="+mj-lt"/>
+              <a:ea typeface="+mj-ea"/>
+              <a:cs typeface="+mj-cs"/>
+              <a:sym typeface="Calibri"/>
+            </a:endParaRPr>
+          </a:p>
+        </p:txBody>
+      </p:sp>
+      <p:sp>
+        <p:nvSpPr>
+          <p:cNvPr id="28" name="Oval 27"/>
+          <p:cNvSpPr/>
+          <p:nvPr/>
+        </p:nvSpPr>
+        <p:spPr>
+          <a:xfrm>
+            <a:off x="6196547" y="5345915"/>
+            <a:ext cx="179200" cy="207818"/>
+          </a:xfrm>
+          <a:prstGeom prst="ellipse">
+            <a:avLst/>
+          </a:prstGeom>
+          <a:solidFill>
+            <a:schemeClr val="tx2"/>
+          </a:solidFill>
+          <a:ln w="12700" cap="flat">
+            <a:solidFill>
+              <a:schemeClr val="accent1"/>
+            </a:solidFill>
+            <a:prstDash val="solid"/>
+            <a:miter lim="800000"/>
+          </a:ln>
+          <a:effectLst/>
+          <a:sp3d/>
+        </p:spPr>
+        <p:style>
+          <a:lnRef idx="0">
+            <a:scrgbClr r="0" g="0" b="0"/>
+          </a:lnRef>
+          <a:fillRef idx="0">
+            <a:scrgbClr r="0" g="0" b="0"/>
+          </a:fillRef>
+          <a:effectRef idx="0">
+            <a:scrgbClr r="0" g="0" b="0"/>
+          </a:effectRef>
+          <a:fontRef idx="none"/>
+        </p:style>
+        <p:txBody>
+          <a:bodyPr rot="0" spcFirstLastPara="1" vertOverflow="overflow" horzOverflow="overflow" vert="horz" wrap="square" lIns="45719" tIns="45719" rIns="45719" bIns="45719" numCol="1" spcCol="38100" rtlCol="0" anchor="ctr">
+            <a:spAutoFit/>
+          </a:bodyPr>
+          <a:lstStyle/>
+          <a:p>
+            <a:pPr marL="0" marR="0" indent="0" algn="l" defTabSz="914400" rtl="0" fontAlgn="auto" latinLnBrk="0" hangingPunct="0">
+              <a:lnSpc>
+                <a:spcPct val="100000"/>
+              </a:lnSpc>
+              <a:spcBef>
+                <a:spcPts val="0"/>
+              </a:spcBef>
+              <a:spcAft>
+                <a:spcPts val="0"/>
+              </a:spcAft>
+              <a:buClrTx/>
+              <a:buSzTx/>
+              <a:buFontTx/>
+              <a:buNone/>
+              <a:tabLst/>
+            </a:pPr>
+            <a:endParaRPr kumimoji="0" lang="en-US" sz="1800" b="0" i="0" u="none" strike="noStrike" cap="none" spc="0" normalizeH="0" baseline="0">
+              <a:ln>
+                <a:noFill/>
+              </a:ln>
+              <a:solidFill>
+                <a:srgbClr val="FEFFFE"/>
+              </a:solidFill>
+              <a:effectLst/>
+              <a:uFillTx/>
+              <a:latin typeface="+mj-lt"/>
+              <a:ea typeface="+mj-ea"/>
+              <a:cs typeface="+mj-cs"/>
+              <a:sym typeface="Calibri"/>
             </a:endParaRPr>
           </a:p>
         </p:txBody>
@@ -17437,6 +18486,13 @@
     <a:masterClrMapping/>
   </p:clrMapOvr>
   <p:transition spd="med"/>
+  <p:timing>
+    <p:tnLst>
+      <p:par>
+        <p:cTn id="1" dur="indefinite" restart="never" nodeType="tmRoot"/>
+      </p:par>
+    </p:tnLst>
+  </p:timing>
 </p:sld>
 </file>
 
@@ -17482,7 +18538,7 @@
         <p:spPr>
           <a:xfrm>
             <a:off x="640854" y="2951018"/>
-            <a:ext cx="8007631" cy="3173252"/>
+            <a:ext cx="11048862" cy="3173252"/>
           </a:xfrm>
           <a:prstGeom prst="rect">
             <a:avLst/>
@@ -17490,7 +18546,7 @@
         </p:spPr>
         <p:txBody>
           <a:bodyPr lIns="45719" tIns="45720" rIns="45719" bIns="45720" anchor="ctr">
-            <a:normAutofit lnSpcReduction="10000"/>
+            <a:normAutofit/>
           </a:bodyPr>
           <a:lstStyle/>
           <a:p>
@@ -18062,6 +19118,13 @@
     <a:masterClrMapping/>
   </p:clrMapOvr>
   <p:transition spd="med"/>
+  <p:timing>
+    <p:tnLst>
+      <p:par>
+        <p:cTn id="1" dur="indefinite" restart="never" nodeType="tmRoot"/>
+      </p:par>
+    </p:tnLst>
+  </p:timing>
 </p:sld>
 </file>
 
@@ -18094,8 +19157,8 @@
         </p:nvSpPr>
         <p:spPr>
           <a:xfrm>
-            <a:off x="461654" y="3660797"/>
-            <a:ext cx="5759946" cy="2313386"/>
+            <a:off x="461654" y="3660796"/>
+            <a:ext cx="5759946" cy="2338221"/>
           </a:xfrm>
           <a:prstGeom prst="rect">
             <a:avLst/>
@@ -18130,27 +19193,8 @@
                 <a:ea typeface="Merriweather Sans Light"/>
                 <a:cs typeface="Merriweather Sans Light"/>
               </a:rPr>
-              <a:t>Expand the dataset: Integrate additional years, subnational production data, and complementary climate variables (soil moisture, evapotranspiration, temperature) to improve model accuracy beyond the current R² ≈ 0.35</a:t>
-            </a:r>
-            <a:r>
-              <a:rPr lang="en-US" sz="1400" dirty="0">
-                <a:solidFill>
-                  <a:srgbClr val="000000"/>
-                </a:solidFill>
-                <a:latin typeface="Merriweather Sans Light"/>
-                <a:ea typeface="Merriweather Sans Light"/>
-                <a:cs typeface="Merriweather Sans Light"/>
-              </a:rPr>
-              <a:t>.</a:t>
-            </a:r>
-            <a:endParaRPr lang="en-US" sz="1400" dirty="0">
-              <a:solidFill>
-                <a:srgbClr val="000000"/>
-              </a:solidFill>
-              <a:latin typeface="Merriweather Sans Light"/>
-              <a:ea typeface="Merriweather Sans Light"/>
-              <a:cs typeface="Merriweather Sans Light"/>
-            </a:endParaRPr>
+              <a:t>Expand the dataset: Integrate additional years, subnational production data, and complementary climate variables (soil moisture, evapotranspiration, temperature) to improve model accuracy beyond the current R² ≈ 0.35.</a:t>
+            </a:r>
           </a:p>
           <a:p>
             <a:pPr>
@@ -18176,27 +19220,8 @@
                 <a:ea typeface="Merriweather Sans Light"/>
                 <a:cs typeface="Merriweather Sans Light"/>
               </a:rPr>
-              <a:t>Advanced modelling: Move beyond linear regression to gradient boosting, random forests, and time-series models (ARIMAX, LSTM) once the sample size supports it; validate predictions against real harvest outcomes as FAOSTAT publishes them</a:t>
-            </a:r>
-            <a:r>
-              <a:rPr lang="en-US" sz="1400" dirty="0">
-                <a:solidFill>
-                  <a:srgbClr val="000000"/>
-                </a:solidFill>
-                <a:latin typeface="Merriweather Sans Light"/>
-                <a:ea typeface="Merriweather Sans Light"/>
-                <a:cs typeface="Merriweather Sans Light"/>
-              </a:rPr>
-              <a:t>.</a:t>
-            </a:r>
-            <a:endParaRPr lang="en-US" sz="1400" dirty="0">
-              <a:solidFill>
-                <a:srgbClr val="000000"/>
-              </a:solidFill>
-              <a:latin typeface="Merriweather Sans Light"/>
-              <a:ea typeface="Merriweather Sans Light"/>
-              <a:cs typeface="Merriweather Sans Light"/>
-            </a:endParaRPr>
+              <a:t>Advanced modelling: Move beyond linear regression to gradient boosting, random forests, and time-series models (ARIMAX, LSTM) once the sample size supports it; validate predictions against real harvest outcomes as FAOSTAT publishes them.</a:t>
+            </a:r>
           </a:p>
           <a:p>
             <a:pPr>
@@ -18310,27 +19335,8 @@
                 <a:ea typeface="Merriweather Sans Light"/>
                 <a:cs typeface="Merriweather Sans Light"/>
               </a:rPr>
-              <a:t> backend to replace coarse gridded estimates with ground truth</a:t>
-            </a:r>
-            <a:r>
-              <a:rPr lang="en-US" sz="1400" dirty="0">
-                <a:solidFill>
-                  <a:srgbClr val="000000"/>
-                </a:solidFill>
-                <a:latin typeface="Merriweather Sans Light"/>
-                <a:ea typeface="Merriweather Sans Light"/>
-                <a:cs typeface="Merriweather Sans Light"/>
-              </a:rPr>
-              <a:t>.</a:t>
-            </a:r>
-            <a:endParaRPr lang="en-US" sz="1400" dirty="0">
-              <a:solidFill>
-                <a:srgbClr val="000000"/>
-              </a:solidFill>
-              <a:latin typeface="Merriweather Sans Light"/>
-              <a:ea typeface="Merriweather Sans Light"/>
-              <a:cs typeface="Merriweather Sans Light"/>
-            </a:endParaRPr>
+              <a:t> backend to replace coarse gridded estimates with ground truth.</a:t>
+            </a:r>
           </a:p>
           <a:p>
             <a:pPr>
@@ -18859,8 +19865,8 @@
         </p:nvSpPr>
         <p:spPr>
           <a:xfrm>
-            <a:off x="6400801" y="2668604"/>
-            <a:ext cx="5110732" cy="3173252"/>
+            <a:off x="6400801" y="2671188"/>
+            <a:ext cx="5110732" cy="3544179"/>
           </a:xfrm>
           <a:prstGeom prst="rect">
             <a:avLst/>
@@ -18870,7 +19876,7 @@
           </a:ln>
           <a:extLst>
             <a:ext uri="{C572A759-6A51-4108-AA02-DFA0A04FC94B}">
-              <ma14:wrappingTextBoxFlag xmlns="" xmlns:m="http://schemas.openxmlformats.org/officeDocument/2006/math" xmlns:a14="http://schemas.microsoft.com/office/drawing/2010/main" xmlns:ma14="http://schemas.microsoft.com/office/mac/drawingml/2011/main" val="1"/>
+              <ma14:wrappingTextBoxFlag xmlns:ma14="http://schemas.microsoft.com/office/mac/drawingml/2011/main" xmlns:a14="http://schemas.microsoft.com/office/drawing/2010/main" xmlns:m="http://schemas.openxmlformats.org/officeDocument/2006/math" xmlns="" val="1"/>
             </a:ext>
           </a:extLst>
         </p:spPr>
@@ -19139,29 +20145,8 @@
                 <a:cs typeface="Merriweather Sans Light"/>
                 <a:sym typeface="Merriweather Sans Light"/>
               </a:rPr>
-              <a:t>Integration with humanitarian workflows: Partner with WFP, FAO, and OCHA to operationalize the early-warning framework — embedding predictions into existing food-security monitoring systems and prepositioning pipelines</a:t>
-            </a:r>
-            <a:r>
-              <a:rPr lang="en-US" sz="1400" dirty="0">
-                <a:solidFill>
-                  <a:srgbClr val="000000"/>
-                </a:solidFill>
-                <a:latin typeface="Merriweather Sans Light"/>
-                <a:ea typeface="Merriweather Sans Light"/>
-                <a:cs typeface="Merriweather Sans Light"/>
-                <a:sym typeface="Merriweather Sans Light"/>
-              </a:rPr>
-              <a:t>.</a:t>
-            </a:r>
-            <a:endParaRPr lang="en-US" sz="1400" dirty="0">
-              <a:solidFill>
-                <a:srgbClr val="000000"/>
-              </a:solidFill>
-              <a:latin typeface="Merriweather Sans Light"/>
-              <a:ea typeface="Merriweather Sans Light"/>
-              <a:cs typeface="Merriweather Sans Light"/>
-              <a:sym typeface="Merriweather Sans Light"/>
-            </a:endParaRPr>
+              <a:t>Integration with humanitarian workflows: Partner with WFP, FAO, and OCHA to operationalize the early-warning framework — embedding predictions into existing food-security monitoring systems and prepositioning pipelines.</a:t>
+            </a:r>
           </a:p>
           <a:p>
             <a:pPr hangingPunct="1">
@@ -19188,29 +20173,8 @@
                 <a:cs typeface="Merriweather Sans Light"/>
                 <a:sym typeface="Merriweather Sans Light"/>
               </a:rPr>
-              <a:t>Multi-country expansion: Adapt the pipeline to Iraq, Lebanon, Jordan, and Yemen — all wheat-importing countries facing similar climate stress — as a shared regional early-warning platform</a:t>
-            </a:r>
-            <a:r>
-              <a:rPr lang="en-US" sz="1400" dirty="0">
-                <a:solidFill>
-                  <a:srgbClr val="000000"/>
-                </a:solidFill>
-                <a:latin typeface="Merriweather Sans Light"/>
-                <a:ea typeface="Merriweather Sans Light"/>
-                <a:cs typeface="Merriweather Sans Light"/>
-                <a:sym typeface="Merriweather Sans Light"/>
-              </a:rPr>
-              <a:t>.</a:t>
-            </a:r>
-            <a:endParaRPr lang="en-US" sz="1400" dirty="0">
-              <a:solidFill>
-                <a:srgbClr val="000000"/>
-              </a:solidFill>
-              <a:latin typeface="Merriweather Sans Light"/>
-              <a:ea typeface="Merriweather Sans Light"/>
-              <a:cs typeface="Merriweather Sans Light"/>
-              <a:sym typeface="Merriweather Sans Light"/>
-            </a:endParaRPr>
+              <a:t>Multi-country expansion: Adapt the pipeline to Iraq, Lebanon, Jordan, and Yemen — all wheat-importing countries facing similar climate stress — as a shared regional early-warning platform.</a:t>
+            </a:r>
           </a:p>
           <a:p>
             <a:pPr hangingPunct="1">
@@ -19237,29 +20201,8 @@
                 <a:cs typeface="Merriweather Sans Light"/>
                 <a:sym typeface="Merriweather Sans Light"/>
               </a:rPr>
-              <a:t>Open-source release: Publish the pipeline as a documented Python package with example notebooks, enabling researchers and NGOs to replicate the analysis for other crops and regions</a:t>
-            </a:r>
-            <a:r>
-              <a:rPr lang="en-US" sz="1400" dirty="0">
-                <a:solidFill>
-                  <a:srgbClr val="000000"/>
-                </a:solidFill>
-                <a:latin typeface="Merriweather Sans Light"/>
-                <a:ea typeface="Merriweather Sans Light"/>
-                <a:cs typeface="Merriweather Sans Light"/>
-                <a:sym typeface="Merriweather Sans Light"/>
-              </a:rPr>
-              <a:t>.</a:t>
-            </a:r>
-            <a:endParaRPr lang="en-US" sz="1400" dirty="0">
-              <a:solidFill>
-                <a:srgbClr val="000000"/>
-              </a:solidFill>
-              <a:latin typeface="Merriweather Sans Light"/>
-              <a:ea typeface="Merriweather Sans Light"/>
-              <a:cs typeface="Merriweather Sans Light"/>
-              <a:sym typeface="Merriweather Sans Light"/>
-            </a:endParaRPr>
+              <a:t>Open-source release: Publish the pipeline as a documented Python package with example notebooks, enabling researchers and NGOs to replicate the analysis for other crops and regions.</a:t>
+            </a:r>
           </a:p>
           <a:p>
             <a:pPr hangingPunct="1">
@@ -19302,6 +20245,13 @@
     <a:masterClrMapping/>
   </p:clrMapOvr>
   <p:transition spd="med"/>
+  <p:timing>
+    <p:tnLst>
+      <p:par>
+        <p:cTn id="1" dur="indefinite" restart="never" nodeType="tmRoot"/>
+      </p:par>
+    </p:tnLst>
+  </p:timing>
 </p:sld>
 </file>
 
@@ -21699,15 +22649,6 @@
 </file>
 
 <file path=customXml/item2.xml><?xml version="1.0" encoding="utf-8"?>
-<?mso-contentType ?>
-<FormTemplates xmlns="http://schemas.microsoft.com/sharepoint/v3/contenttype/forms">
-  <Display>DocumentLibraryForm</Display>
-  <Edit>DocumentLibraryForm</Edit>
-  <New>DocumentLibraryForm</New>
-</FormTemplates>
-</file>
-
-<file path=customXml/item3.xml><?xml version="1.0" encoding="utf-8"?>
 <p:properties xmlns:p="http://schemas.microsoft.com/office/2006/metadata/properties" xmlns:xsi="http://www.w3.org/2001/XMLSchema-instance" xmlns:pc="http://schemas.microsoft.com/office/infopath/2007/PartnerControls">
   <documentManagement>
     <TaxCatchAll xmlns="97847797-b717-4ffb-b5fd-2a237f853cda" xsi:nil="true"/>
@@ -21725,6 +22666,15 @@
     <Time xmlns="6259e846-8b77-4076-b7b3-191dee427045" xsi:nil="true"/>
   </documentManagement>
 </p:properties>
+</file>
+
+<file path=customXml/item3.xml><?xml version="1.0" encoding="utf-8"?>
+<?mso-contentType ?>
+<FormTemplates xmlns="http://schemas.microsoft.com/sharepoint/v3/contenttype/forms">
+  <Display>DocumentLibraryForm</Display>
+  <Edit>DocumentLibraryForm</Edit>
+  <New>DocumentLibraryForm</New>
+</FormTemplates>
 </file>
 
 <file path=customXml/itemProps1.xml><?xml version="1.0" encoding="utf-8"?>
@@ -21747,14 +22697,6 @@
 </file>
 
 <file path=customXml/itemProps2.xml><?xml version="1.0" encoding="utf-8"?>
-<ds:datastoreItem xmlns:ds="http://schemas.openxmlformats.org/officeDocument/2006/customXml" ds:itemID="{E2FFB1A3-86F8-4D83-B399-9B6D5E293CEC}">
-  <ds:schemaRefs>
-    <ds:schemaRef ds:uri="http://schemas.microsoft.com/sharepoint/v3/contenttype/forms"/>
-  </ds:schemaRefs>
-</ds:datastoreItem>
-</file>
-
-<file path=customXml/itemProps3.xml><?xml version="1.0" encoding="utf-8"?>
 <ds:datastoreItem xmlns:ds="http://schemas.openxmlformats.org/officeDocument/2006/customXml" ds:itemID="{A22449C5-8A7C-4DDF-8BBD-9834F5F8D2B3}">
   <ds:schemaRefs>
     <ds:schemaRef ds:uri="6259e846-8b77-4076-b7b3-191dee427045"/>
@@ -21769,4 +22711,12 @@
     <ds:schemaRef ds:uri="http://www.w3.org/XML/1998/namespace"/>
   </ds:schemaRefs>
 </ds:datastoreItem>
+</file>
+
+<file path=customXml/itemProps3.xml><?xml version="1.0" encoding="utf-8"?>
+<ds:datastoreItem xmlns:ds="http://schemas.openxmlformats.org/officeDocument/2006/customXml" ds:itemID="{E2FFB1A3-86F8-4D83-B399-9B6D5E293CEC}">
+  <ds:schemaRefs>
+    <ds:schemaRef ds:uri="http://schemas.microsoft.com/sharepoint/v3/contenttype/forms"/>
+  </ds:schemaRefs>
+</ds:datastoreItem>
 </file>